--- a/mapa_editable.pptx
+++ b/mapa_editable.pptx
@@ -5530,7 +5530,7 @@
                   <a:srgbClr val="152633"/>
                 </a:solidFill>
               </a:rPr>
-              <a:t>Reporte anterior (10/10/2026)</a:t>
+              <a:t>Reporte anterior (11/10/2026)</a:t>
             </a:r>
           </a:p>
         </p:txBody>
@@ -5564,7 +5564,7 @@
                   <a:srgbClr val="152633"/>
                 </a:solidFill>
               </a:rPr>
-              <a:t>Reporte actual (11/10/2026)</a:t>
+              <a:t>Reporte actual (12/10/2026)</a:t>
             </a:r>
           </a:p>
         </p:txBody>

--- a/mapa_editable.pptx
+++ b/mapa_editable.pptx
@@ -4126,7 +4126,7 @@
                   <a:srgbClr val="152633"/>
                 </a:solidFill>
               </a:rPr>
-              <a:t>50.4% llenado</a:t>
+              <a:t>52.8% llenado</a:t>
             </a:r>
           </a:p>
         </p:txBody>
@@ -4238,7 +4238,7 @@
                   <a:srgbClr val="152633"/>
                 </a:solidFill>
               </a:rPr>
-              <a:t>56.1% llenado</a:t>
+              <a:t>58.3% llenado</a:t>
             </a:r>
           </a:p>
         </p:txBody>
@@ -4339,7 +4339,7 @@
                   <a:srgbClr val="152633"/>
                 </a:solidFill>
               </a:rPr>
-              <a:t>66.8% llenado</a:t>
+              <a:t>68.8% llenado</a:t>
             </a:r>
           </a:p>
         </p:txBody>
@@ -4440,7 +4440,7 @@
                   <a:srgbClr val="152633"/>
                 </a:solidFill>
               </a:rPr>
-              <a:t>101.6% llenado</a:t>
+              <a:t>103.1% llenado</a:t>
             </a:r>
           </a:p>
         </p:txBody>
@@ -4552,7 +4552,7 @@
                   <a:srgbClr val="152633"/>
                 </a:solidFill>
               </a:rPr>
-              <a:t>94.9% llenado</a:t>
+              <a:t>104.1% llenado</a:t>
             </a:r>
           </a:p>
         </p:txBody>
@@ -5734,7 +5734,7 @@
                   <a:srgbClr val="152633"/>
                 </a:solidFill>
               </a:rPr>
-              <a:t>50.4%</a:t>
+              <a:t>52.8%</a:t>
             </a:r>
           </a:p>
         </p:txBody>
@@ -5815,8 +5815,8 @@
         </p:nvSpPr>
         <p:spPr>
           <a:xfrm>
-            <a:off x="12626035" y="7047280"/>
-            <a:ext cx="722376" cy="171907"/>
+            <a:off x="12721132" y="7056424"/>
+            <a:ext cx="530352" cy="162763"/>
           </a:xfrm>
           <a:prstGeom prst="rect">
             <a:avLst/>
@@ -5833,10 +5833,10 @@
             <a:r>
               <a:rPr sz="850" b="1" i="0">
                 <a:solidFill>
-                  <a:srgbClr val="4A6273"/>
-                </a:solidFill>
-              </a:rPr>
-              <a:t>sin cambio</a:t>
+                  <a:srgbClr val="1B5FA8"/>
+                </a:solidFill>
+              </a:rPr>
+              <a:t>▲ +2.40</a:t>
             </a:r>
           </a:p>
         </p:txBody>
@@ -5938,7 +5938,7 @@
                   <a:srgbClr val="152633"/>
                 </a:solidFill>
               </a:rPr>
-              <a:t>56.1%</a:t>
+              <a:t>58.3%</a:t>
             </a:r>
           </a:p>
         </p:txBody>
@@ -6019,8 +6019,8 @@
         </p:nvSpPr>
         <p:spPr>
           <a:xfrm>
-            <a:off x="12626035" y="7339888"/>
-            <a:ext cx="722376" cy="171907"/>
+            <a:off x="12721132" y="7349032"/>
+            <a:ext cx="530352" cy="162763"/>
           </a:xfrm>
           <a:prstGeom prst="rect">
             <a:avLst/>
@@ -6037,10 +6037,10 @@
             <a:r>
               <a:rPr sz="850" b="1" i="0">
                 <a:solidFill>
-                  <a:srgbClr val="4A6273"/>
-                </a:solidFill>
-              </a:rPr>
-              <a:t>sin cambio</a:t>
+                  <a:srgbClr val="1B5FA8"/>
+                </a:solidFill>
+              </a:rPr>
+              <a:t>▲ +2.20</a:t>
             </a:r>
           </a:p>
         </p:txBody>
@@ -6142,7 +6142,7 @@
                   <a:srgbClr val="152633"/>
                 </a:solidFill>
               </a:rPr>
-              <a:t>66.8%</a:t>
+              <a:t>68.8%</a:t>
             </a:r>
           </a:p>
         </p:txBody>
@@ -6223,8 +6223,8 @@
         </p:nvSpPr>
         <p:spPr>
           <a:xfrm>
-            <a:off x="12626035" y="7631582"/>
-            <a:ext cx="722376" cy="171907"/>
+            <a:off x="12721132" y="7640726"/>
+            <a:ext cx="530352" cy="162763"/>
           </a:xfrm>
           <a:prstGeom prst="rect">
             <a:avLst/>
@@ -6241,10 +6241,10 @@
             <a:r>
               <a:rPr sz="850" b="1" i="0">
                 <a:solidFill>
-                  <a:srgbClr val="4A6273"/>
-                </a:solidFill>
-              </a:rPr>
-              <a:t>sin cambio</a:t>
+                  <a:srgbClr val="1B5FA8"/>
+                </a:solidFill>
+              </a:rPr>
+              <a:t>▲ +2.00</a:t>
             </a:r>
           </a:p>
         </p:txBody>
@@ -6346,7 +6346,7 @@
                   <a:srgbClr val="152633"/>
                 </a:solidFill>
               </a:rPr>
-              <a:t>101.6%</a:t>
+              <a:t>103.1%</a:t>
             </a:r>
           </a:p>
         </p:txBody>
@@ -6427,8 +6427,8 @@
         </p:nvSpPr>
         <p:spPr>
           <a:xfrm>
-            <a:off x="12626035" y="7923276"/>
-            <a:ext cx="722376" cy="171907"/>
+            <a:off x="12721132" y="7932420"/>
+            <a:ext cx="530352" cy="162763"/>
           </a:xfrm>
           <a:prstGeom prst="rect">
             <a:avLst/>
@@ -6445,10 +6445,10 @@
             <a:r>
               <a:rPr sz="850" b="1" i="0">
                 <a:solidFill>
-                  <a:srgbClr val="4A6273"/>
-                </a:solidFill>
-              </a:rPr>
-              <a:t>sin cambio</a:t>
+                  <a:srgbClr val="1B5FA8"/>
+                </a:solidFill>
+              </a:rPr>
+              <a:t>▲ +1.50</a:t>
             </a:r>
           </a:p>
         </p:txBody>
@@ -6529,8 +6529,8 @@
         </p:nvSpPr>
         <p:spPr>
           <a:xfrm>
-            <a:off x="10504627" y="8225028"/>
-            <a:ext cx="429768" cy="162763"/>
+            <a:off x="10468051" y="8225028"/>
+            <a:ext cx="502920" cy="162763"/>
           </a:xfrm>
           <a:prstGeom prst="rect">
             <a:avLst/>
@@ -6550,7 +6550,7 @@
                   <a:srgbClr val="152633"/>
                 </a:solidFill>
               </a:rPr>
-              <a:t>94.9%</a:t>
+              <a:t>104.1%</a:t>
             </a:r>
           </a:p>
         </p:txBody>
@@ -6563,8 +6563,8 @@
         </p:nvSpPr>
         <p:spPr>
           <a:xfrm>
-            <a:off x="14720925" y="8215884"/>
-            <a:ext cx="783640" cy="170992"/>
+            <a:off x="14867229" y="8229600"/>
+            <a:ext cx="490118" cy="156362"/>
           </a:xfrm>
           <a:prstGeom prst="rect">
             <a:avLst/>
@@ -6581,10 +6581,10 @@
             <a:r>
               <a:rPr sz="800" b="1" i="0">
                 <a:solidFill>
-                  <a:srgbClr val="8A6D00"/>
-                </a:solidFill>
-              </a:rPr>
-              <a:t>PRECAUCIÓN</a:t>
+                  <a:srgbClr val="A50E0E"/>
+                </a:solidFill>
+              </a:rPr>
+              <a:t>ALERTA</a:t>
             </a:r>
           </a:p>
         </p:txBody>
@@ -6631,8 +6631,8 @@
         </p:nvSpPr>
         <p:spPr>
           <a:xfrm>
-            <a:off x="12626035" y="8215884"/>
-            <a:ext cx="722376" cy="171907"/>
+            <a:off x="12721132" y="8225028"/>
+            <a:ext cx="530352" cy="162763"/>
           </a:xfrm>
           <a:prstGeom prst="rect">
             <a:avLst/>
@@ -6649,10 +6649,10 @@
             <a:r>
               <a:rPr sz="850" b="1" i="0">
                 <a:solidFill>
-                  <a:srgbClr val="4A6273"/>
-                </a:solidFill>
-              </a:rPr>
-              <a:t>sin cambio</a:t>
+                  <a:srgbClr val="1B5FA8"/>
+                </a:solidFill>
+              </a:rPr>
+              <a:t>▲ +9.20</a:t>
             </a:r>
           </a:p>
         </p:txBody>
@@ -8046,7 +8046,7 @@
                   <a:srgbClr val="8A6D00"/>
                 </a:solidFill>
               </a:rPr>
-              <a:t>1</a:t>
+              <a:t>0</a:t>
             </a:r>
           </a:p>
         </p:txBody>
@@ -8114,7 +8114,7 @@
                   <a:srgbClr val="A50E0E"/>
                 </a:solidFill>
               </a:rPr>
-              <a:t>2</a:t>
+              <a:t>3</a:t>
             </a:r>
           </a:p>
         </p:txBody>

--- a/mapa_editable.pptx
+++ b/mapa_editable.pptx
@@ -4126,7 +4126,7 @@
                   <a:srgbClr val="152633"/>
                 </a:solidFill>
               </a:rPr>
-              <a:t>52.8% llenado</a:t>
+              <a:t>53.0% llenado</a:t>
             </a:r>
           </a:p>
         </p:txBody>
@@ -4339,7 +4339,7 @@
                   <a:srgbClr val="152633"/>
                 </a:solidFill>
               </a:rPr>
-              <a:t>68.8% llenado</a:t>
+              <a:t>69.1% llenado</a:t>
             </a:r>
           </a:p>
         </p:txBody>
@@ -4440,7 +4440,7 @@
                   <a:srgbClr val="152633"/>
                 </a:solidFill>
               </a:rPr>
-              <a:t>103.1% llenado</a:t>
+              <a:t>102.7% llenado</a:t>
             </a:r>
           </a:p>
         </p:txBody>
@@ -4552,7 +4552,7 @@
                   <a:srgbClr val="152633"/>
                 </a:solidFill>
               </a:rPr>
-              <a:t>104.1% llenado</a:t>
+              <a:t>102.4% llenado</a:t>
             </a:r>
           </a:p>
         </p:txBody>
@@ -5530,7 +5530,7 @@
                   <a:srgbClr val="152633"/>
                 </a:solidFill>
               </a:rPr>
-              <a:t>Reporte anterior (11/10/2026)</a:t>
+              <a:t>Reporte anterior (13/10/2026)</a:t>
             </a:r>
           </a:p>
         </p:txBody>
@@ -5564,7 +5564,7 @@
                   <a:srgbClr val="152633"/>
                 </a:solidFill>
               </a:rPr>
-              <a:t>Reporte actual (12/10/2026)</a:t>
+              <a:t>Reporte actual (14/10/2026)</a:t>
             </a:r>
           </a:p>
         </p:txBody>
@@ -5734,7 +5734,7 @@
                   <a:srgbClr val="152633"/>
                 </a:solidFill>
               </a:rPr>
-              <a:t>52.8%</a:t>
+              <a:t>53.0%</a:t>
             </a:r>
           </a:p>
         </p:txBody>
@@ -5802,7 +5802,7 @@
                   <a:srgbClr val="4A6273"/>
                 </a:solidFill>
               </a:rPr>
-              <a:t>50.4%</a:t>
+              <a:t>52.8%</a:t>
             </a:r>
           </a:p>
         </p:txBody>
@@ -5836,7 +5836,7 @@
                   <a:srgbClr val="1B5FA8"/>
                 </a:solidFill>
               </a:rPr>
-              <a:t>▲ +2.40</a:t>
+              <a:t>▲ +0.20</a:t>
             </a:r>
           </a:p>
         </p:txBody>
@@ -6006,7 +6006,7 @@
                   <a:srgbClr val="4A6273"/>
                 </a:solidFill>
               </a:rPr>
-              <a:t>56.1%</a:t>
+              <a:t>58.3%</a:t>
             </a:r>
           </a:p>
         </p:txBody>
@@ -6019,8 +6019,8 @@
         </p:nvSpPr>
         <p:spPr>
           <a:xfrm>
-            <a:off x="12721132" y="7349032"/>
-            <a:ext cx="530352" cy="162763"/>
+            <a:off x="12626035" y="7339888"/>
+            <a:ext cx="722376" cy="171907"/>
           </a:xfrm>
           <a:prstGeom prst="rect">
             <a:avLst/>
@@ -6037,10 +6037,10 @@
             <a:r>
               <a:rPr sz="850" b="1" i="0">
                 <a:solidFill>
-                  <a:srgbClr val="1B5FA8"/>
-                </a:solidFill>
-              </a:rPr>
-              <a:t>▲ +2.20</a:t>
+                  <a:srgbClr val="4A6273"/>
+                </a:solidFill>
+              </a:rPr>
+              <a:t>sin cambio</a:t>
             </a:r>
           </a:p>
         </p:txBody>
@@ -6142,7 +6142,7 @@
                   <a:srgbClr val="152633"/>
                 </a:solidFill>
               </a:rPr>
-              <a:t>68.8%</a:t>
+              <a:t>69.1%</a:t>
             </a:r>
           </a:p>
         </p:txBody>
@@ -6210,7 +6210,7 @@
                   <a:srgbClr val="4A6273"/>
                 </a:solidFill>
               </a:rPr>
-              <a:t>66.8%</a:t>
+              <a:t>68.8%</a:t>
             </a:r>
           </a:p>
         </p:txBody>
@@ -6244,7 +6244,7 @@
                   <a:srgbClr val="1B5FA8"/>
                 </a:solidFill>
               </a:rPr>
-              <a:t>▲ +2.00</a:t>
+              <a:t>▲ +0.30</a:t>
             </a:r>
           </a:p>
         </p:txBody>
@@ -6346,7 +6346,7 @@
                   <a:srgbClr val="152633"/>
                 </a:solidFill>
               </a:rPr>
-              <a:t>103.1%</a:t>
+              <a:t>102.7%</a:t>
             </a:r>
           </a:p>
         </p:txBody>
@@ -6414,7 +6414,7 @@
                   <a:srgbClr val="4A6273"/>
                 </a:solidFill>
               </a:rPr>
-              <a:t>101.6%</a:t>
+              <a:t>103.1%</a:t>
             </a:r>
           </a:p>
         </p:txBody>
@@ -6427,8 +6427,8 @@
         </p:nvSpPr>
         <p:spPr>
           <a:xfrm>
-            <a:off x="12721132" y="7932420"/>
-            <a:ext cx="530352" cy="162763"/>
+            <a:off x="12744907" y="7932420"/>
+            <a:ext cx="484632" cy="162763"/>
           </a:xfrm>
           <a:prstGeom prst="rect">
             <a:avLst/>
@@ -6445,10 +6445,10 @@
             <a:r>
               <a:rPr sz="850" b="1" i="0">
                 <a:solidFill>
-                  <a:srgbClr val="1B5FA8"/>
-                </a:solidFill>
-              </a:rPr>
-              <a:t>▲ +1.50</a:t>
+                  <a:srgbClr val="B3541F"/>
+                </a:solidFill>
+              </a:rPr>
+              <a:t>▼ -0.40</a:t>
             </a:r>
           </a:p>
         </p:txBody>
@@ -6550,7 +6550,7 @@
                   <a:srgbClr val="152633"/>
                 </a:solidFill>
               </a:rPr>
-              <a:t>104.1%</a:t>
+              <a:t>102.4%</a:t>
             </a:r>
           </a:p>
         </p:txBody>
@@ -6597,8 +6597,8 @@
         </p:nvSpPr>
         <p:spPr>
           <a:xfrm>
-            <a:off x="8246059" y="8225028"/>
-            <a:ext cx="411480" cy="162763"/>
+            <a:off x="8209483" y="8225028"/>
+            <a:ext cx="484632" cy="162763"/>
           </a:xfrm>
           <a:prstGeom prst="rect">
             <a:avLst/>
@@ -6618,7 +6618,7 @@
                   <a:srgbClr val="4A6273"/>
                 </a:solidFill>
               </a:rPr>
-              <a:t>94.9%</a:t>
+              <a:t>104.1%</a:t>
             </a:r>
           </a:p>
         </p:txBody>
@@ -6631,8 +6631,8 @@
         </p:nvSpPr>
         <p:spPr>
           <a:xfrm>
-            <a:off x="12721132" y="8225028"/>
-            <a:ext cx="530352" cy="162763"/>
+            <a:off x="12744907" y="8225028"/>
+            <a:ext cx="484632" cy="162763"/>
           </a:xfrm>
           <a:prstGeom prst="rect">
             <a:avLst/>
@@ -6649,10 +6649,10 @@
             <a:r>
               <a:rPr sz="850" b="1" i="0">
                 <a:solidFill>
-                  <a:srgbClr val="1B5FA8"/>
-                </a:solidFill>
-              </a:rPr>
-              <a:t>▲ +9.20</a:t>
+                  <a:srgbClr val="B3541F"/>
+                </a:solidFill>
+              </a:rPr>
+              <a:t>▼ -1.70</a:t>
             </a:r>
           </a:p>
         </p:txBody>

--- a/mapa_editable.pptx
+++ b/mapa_editable.pptx
@@ -4126,7 +4126,7 @@
                   <a:srgbClr val="152633"/>
                 </a:solidFill>
               </a:rPr>
-              <a:t>53.0% llenado</a:t>
+              <a:t>53.3% llenado</a:t>
             </a:r>
           </a:p>
         </p:txBody>
@@ -4238,7 +4238,7 @@
                   <a:srgbClr val="152633"/>
                 </a:solidFill>
               </a:rPr>
-              <a:t>58.3% llenado</a:t>
+              <a:t>54.5% llenado</a:t>
             </a:r>
           </a:p>
         </p:txBody>
@@ -4339,7 +4339,7 @@
                   <a:srgbClr val="152633"/>
                 </a:solidFill>
               </a:rPr>
-              <a:t>69.1% llenado</a:t>
+              <a:t>69.3% llenado</a:t>
             </a:r>
           </a:p>
         </p:txBody>
@@ -4440,7 +4440,7 @@
                   <a:srgbClr val="152633"/>
                 </a:solidFill>
               </a:rPr>
-              <a:t>102.7% llenado</a:t>
+              <a:t>102.6% llenado</a:t>
             </a:r>
           </a:p>
         </p:txBody>
@@ -5734,7 +5734,7 @@
                   <a:srgbClr val="152633"/>
                 </a:solidFill>
               </a:rPr>
-              <a:t>53.0%</a:t>
+              <a:t>53.3%</a:t>
             </a:r>
           </a:p>
         </p:txBody>
@@ -5836,7 +5836,7 @@
                   <a:srgbClr val="1B5FA8"/>
                 </a:solidFill>
               </a:rPr>
-              <a:t>▲ +0.20</a:t>
+              <a:t>▲ +0.50</a:t>
             </a:r>
           </a:p>
         </p:txBody>
@@ -5938,7 +5938,7 @@
                   <a:srgbClr val="152633"/>
                 </a:solidFill>
               </a:rPr>
-              <a:t>58.3%</a:t>
+              <a:t>54.5%</a:t>
             </a:r>
           </a:p>
         </p:txBody>
@@ -6019,8 +6019,8 @@
         </p:nvSpPr>
         <p:spPr>
           <a:xfrm>
-            <a:off x="12626035" y="7339888"/>
-            <a:ext cx="722376" cy="171907"/>
+            <a:off x="12744907" y="7349032"/>
+            <a:ext cx="484632" cy="162763"/>
           </a:xfrm>
           <a:prstGeom prst="rect">
             <a:avLst/>
@@ -6037,10 +6037,10 @@
             <a:r>
               <a:rPr sz="850" b="1" i="0">
                 <a:solidFill>
-                  <a:srgbClr val="4A6273"/>
-                </a:solidFill>
-              </a:rPr>
-              <a:t>sin cambio</a:t>
+                  <a:srgbClr val="B3541F"/>
+                </a:solidFill>
+              </a:rPr>
+              <a:t>▼ -3.80</a:t>
             </a:r>
           </a:p>
         </p:txBody>
@@ -6142,7 +6142,7 @@
                   <a:srgbClr val="152633"/>
                 </a:solidFill>
               </a:rPr>
-              <a:t>69.1%</a:t>
+              <a:t>69.3%</a:t>
             </a:r>
           </a:p>
         </p:txBody>
@@ -6244,7 +6244,7 @@
                   <a:srgbClr val="1B5FA8"/>
                 </a:solidFill>
               </a:rPr>
-              <a:t>▲ +0.30</a:t>
+              <a:t>▲ +0.50</a:t>
             </a:r>
           </a:p>
         </p:txBody>
@@ -6346,7 +6346,7 @@
                   <a:srgbClr val="152633"/>
                 </a:solidFill>
               </a:rPr>
-              <a:t>102.7%</a:t>
+              <a:t>102.6%</a:t>
             </a:r>
           </a:p>
         </p:txBody>
@@ -6448,7 +6448,7 @@
                   <a:srgbClr val="B3541F"/>
                 </a:solidFill>
               </a:rPr>
-              <a:t>▼ -0.40</a:t>
+              <a:t>▼ -0.50</a:t>
             </a:r>
           </a:p>
         </p:txBody>

--- a/mapa_editable.pptx
+++ b/mapa_editable.pptx
@@ -4126,7 +4126,7 @@
                   <a:srgbClr val="152633"/>
                 </a:solidFill>
               </a:rPr>
-              <a:t>53.3% llenado</a:t>
+              <a:t>53.5% llenado</a:t>
             </a:r>
           </a:p>
         </p:txBody>
@@ -4238,7 +4238,7 @@
                   <a:srgbClr val="152633"/>
                 </a:solidFill>
               </a:rPr>
-              <a:t>54.5% llenado</a:t>
+              <a:t>58.6% llenado</a:t>
             </a:r>
           </a:p>
         </p:txBody>
@@ -4339,7 +4339,7 @@
                   <a:srgbClr val="152633"/>
                 </a:solidFill>
               </a:rPr>
-              <a:t>69.3% llenado</a:t>
+              <a:t>69.6% llenado</a:t>
             </a:r>
           </a:p>
         </p:txBody>
@@ -4440,7 +4440,7 @@
                   <a:srgbClr val="152633"/>
                 </a:solidFill>
               </a:rPr>
-              <a:t>102.6% llenado</a:t>
+              <a:t>102.7% llenado</a:t>
             </a:r>
           </a:p>
         </p:txBody>
@@ -4552,7 +4552,7 @@
                   <a:srgbClr val="152633"/>
                 </a:solidFill>
               </a:rPr>
-              <a:t>102.4% llenado</a:t>
+              <a:t>102.3% llenado</a:t>
             </a:r>
           </a:p>
         </p:txBody>
@@ -5530,7 +5530,7 @@
                   <a:srgbClr val="152633"/>
                 </a:solidFill>
               </a:rPr>
-              <a:t>Reporte anterior (13/10/2026)</a:t>
+              <a:t>Reporte anterior (14/10/2026)</a:t>
             </a:r>
           </a:p>
         </p:txBody>
@@ -5564,7 +5564,7 @@
                   <a:srgbClr val="152633"/>
                 </a:solidFill>
               </a:rPr>
-              <a:t>Reporte actual (14/10/2026)</a:t>
+              <a:t>Reporte actual (15/10/2026)</a:t>
             </a:r>
           </a:p>
         </p:txBody>
@@ -5734,7 +5734,7 @@
                   <a:srgbClr val="152633"/>
                 </a:solidFill>
               </a:rPr>
-              <a:t>53.3%</a:t>
+              <a:t>53.5%</a:t>
             </a:r>
           </a:p>
         </p:txBody>
@@ -5802,7 +5802,7 @@
                   <a:srgbClr val="4A6273"/>
                 </a:solidFill>
               </a:rPr>
-              <a:t>52.8%</a:t>
+              <a:t>53.3%</a:t>
             </a:r>
           </a:p>
         </p:txBody>
@@ -5836,7 +5836,7 @@
                   <a:srgbClr val="1B5FA8"/>
                 </a:solidFill>
               </a:rPr>
-              <a:t>▲ +0.50</a:t>
+              <a:t>▲ +0.20</a:t>
             </a:r>
           </a:p>
         </p:txBody>
@@ -5938,7 +5938,7 @@
                   <a:srgbClr val="152633"/>
                 </a:solidFill>
               </a:rPr>
-              <a:t>54.5%</a:t>
+              <a:t>58.6%</a:t>
             </a:r>
           </a:p>
         </p:txBody>
@@ -6006,7 +6006,7 @@
                   <a:srgbClr val="4A6273"/>
                 </a:solidFill>
               </a:rPr>
-              <a:t>58.3%</a:t>
+              <a:t>54.5%</a:t>
             </a:r>
           </a:p>
         </p:txBody>
@@ -6019,8 +6019,8 @@
         </p:nvSpPr>
         <p:spPr>
           <a:xfrm>
-            <a:off x="12744907" y="7349032"/>
-            <a:ext cx="484632" cy="162763"/>
+            <a:off x="12721132" y="7349032"/>
+            <a:ext cx="530352" cy="162763"/>
           </a:xfrm>
           <a:prstGeom prst="rect">
             <a:avLst/>
@@ -6037,10 +6037,10 @@
             <a:r>
               <a:rPr sz="850" b="1" i="0">
                 <a:solidFill>
-                  <a:srgbClr val="B3541F"/>
-                </a:solidFill>
-              </a:rPr>
-              <a:t>▼ -3.80</a:t>
+                  <a:srgbClr val="1B5FA8"/>
+                </a:solidFill>
+              </a:rPr>
+              <a:t>▲ +4.10</a:t>
             </a:r>
           </a:p>
         </p:txBody>
@@ -6142,7 +6142,7 @@
                   <a:srgbClr val="152633"/>
                 </a:solidFill>
               </a:rPr>
-              <a:t>69.3%</a:t>
+              <a:t>69.6%</a:t>
             </a:r>
           </a:p>
         </p:txBody>
@@ -6210,7 +6210,7 @@
                   <a:srgbClr val="4A6273"/>
                 </a:solidFill>
               </a:rPr>
-              <a:t>68.8%</a:t>
+              <a:t>69.3%</a:t>
             </a:r>
           </a:p>
         </p:txBody>
@@ -6244,7 +6244,7 @@
                   <a:srgbClr val="1B5FA8"/>
                 </a:solidFill>
               </a:rPr>
-              <a:t>▲ +0.50</a:t>
+              <a:t>▲ +0.30</a:t>
             </a:r>
           </a:p>
         </p:txBody>
@@ -6346,7 +6346,7 @@
                   <a:srgbClr val="152633"/>
                 </a:solidFill>
               </a:rPr>
-              <a:t>102.6%</a:t>
+              <a:t>102.7%</a:t>
             </a:r>
           </a:p>
         </p:txBody>
@@ -6414,7 +6414,7 @@
                   <a:srgbClr val="4A6273"/>
                 </a:solidFill>
               </a:rPr>
-              <a:t>103.1%</a:t>
+              <a:t>102.6%</a:t>
             </a:r>
           </a:p>
         </p:txBody>
@@ -6427,8 +6427,8 @@
         </p:nvSpPr>
         <p:spPr>
           <a:xfrm>
-            <a:off x="12744907" y="7932420"/>
-            <a:ext cx="484632" cy="162763"/>
+            <a:off x="12721132" y="7932420"/>
+            <a:ext cx="530352" cy="162763"/>
           </a:xfrm>
           <a:prstGeom prst="rect">
             <a:avLst/>
@@ -6445,10 +6445,10 @@
             <a:r>
               <a:rPr sz="850" b="1" i="0">
                 <a:solidFill>
-                  <a:srgbClr val="B3541F"/>
-                </a:solidFill>
-              </a:rPr>
-              <a:t>▼ -0.50</a:t>
+                  <a:srgbClr val="1B5FA8"/>
+                </a:solidFill>
+              </a:rPr>
+              <a:t>▲ +0.10</a:t>
             </a:r>
           </a:p>
         </p:txBody>
@@ -6550,7 +6550,7 @@
                   <a:srgbClr val="152633"/>
                 </a:solidFill>
               </a:rPr>
-              <a:t>102.4%</a:t>
+              <a:t>102.3%</a:t>
             </a:r>
           </a:p>
         </p:txBody>
@@ -6618,7 +6618,7 @@
                   <a:srgbClr val="4A6273"/>
                 </a:solidFill>
               </a:rPr>
-              <a:t>104.1%</a:t>
+              <a:t>102.4%</a:t>
             </a:r>
           </a:p>
         </p:txBody>
@@ -6652,7 +6652,7 @@
                   <a:srgbClr val="B3541F"/>
                 </a:solidFill>
               </a:rPr>
-              <a:t>▼ -1.70</a:t>
+              <a:t>▼ -0.10</a:t>
             </a:r>
           </a:p>
         </p:txBody>

--- a/mapa_editable.pptx
+++ b/mapa_editable.pptx
@@ -5530,7 +5530,7 @@
                   <a:srgbClr val="152633"/>
                 </a:solidFill>
               </a:rPr>
-              <a:t>Reporte anterior (14/10/2026)</a:t>
+              <a:t>Reporte anterior (15/10/2026)</a:t>
             </a:r>
           </a:p>
         </p:txBody>
@@ -5564,7 +5564,7 @@
                   <a:srgbClr val="152633"/>
                 </a:solidFill>
               </a:rPr>
-              <a:t>Reporte actual (15/10/2026)</a:t>
+              <a:t>Reporte actual (16/10/2026)</a:t>
             </a:r>
           </a:p>
         </p:txBody>
@@ -5802,7 +5802,7 @@
                   <a:srgbClr val="4A6273"/>
                 </a:solidFill>
               </a:rPr>
-              <a:t>53.3%</a:t>
+              <a:t>53.5%</a:t>
             </a:r>
           </a:p>
         </p:txBody>
@@ -5815,8 +5815,8 @@
         </p:nvSpPr>
         <p:spPr>
           <a:xfrm>
-            <a:off x="12721132" y="7056424"/>
-            <a:ext cx="530352" cy="162763"/>
+            <a:off x="12626035" y="7047280"/>
+            <a:ext cx="722376" cy="171907"/>
           </a:xfrm>
           <a:prstGeom prst="rect">
             <a:avLst/>
@@ -5833,10 +5833,10 @@
             <a:r>
               <a:rPr sz="850" b="1" i="0">
                 <a:solidFill>
-                  <a:srgbClr val="1B5FA8"/>
-                </a:solidFill>
-              </a:rPr>
-              <a:t>▲ +0.20</a:t>
+                  <a:srgbClr val="4A6273"/>
+                </a:solidFill>
+              </a:rPr>
+              <a:t>sin cambio</a:t>
             </a:r>
           </a:p>
         </p:txBody>
@@ -6006,7 +6006,7 @@
                   <a:srgbClr val="4A6273"/>
                 </a:solidFill>
               </a:rPr>
-              <a:t>54.5%</a:t>
+              <a:t>58.6%</a:t>
             </a:r>
           </a:p>
         </p:txBody>
@@ -6019,8 +6019,8 @@
         </p:nvSpPr>
         <p:spPr>
           <a:xfrm>
-            <a:off x="12721132" y="7349032"/>
-            <a:ext cx="530352" cy="162763"/>
+            <a:off x="12626035" y="7339888"/>
+            <a:ext cx="722376" cy="171907"/>
           </a:xfrm>
           <a:prstGeom prst="rect">
             <a:avLst/>
@@ -6037,10 +6037,10 @@
             <a:r>
               <a:rPr sz="850" b="1" i="0">
                 <a:solidFill>
-                  <a:srgbClr val="1B5FA8"/>
-                </a:solidFill>
-              </a:rPr>
-              <a:t>▲ +4.10</a:t>
+                  <a:srgbClr val="4A6273"/>
+                </a:solidFill>
+              </a:rPr>
+              <a:t>sin cambio</a:t>
             </a:r>
           </a:p>
         </p:txBody>
@@ -6210,7 +6210,7 @@
                   <a:srgbClr val="4A6273"/>
                 </a:solidFill>
               </a:rPr>
-              <a:t>69.3%</a:t>
+              <a:t>69.6%</a:t>
             </a:r>
           </a:p>
         </p:txBody>
@@ -6223,8 +6223,8 @@
         </p:nvSpPr>
         <p:spPr>
           <a:xfrm>
-            <a:off x="12721132" y="7640726"/>
-            <a:ext cx="530352" cy="162763"/>
+            <a:off x="12626035" y="7631582"/>
+            <a:ext cx="722376" cy="171907"/>
           </a:xfrm>
           <a:prstGeom prst="rect">
             <a:avLst/>
@@ -6241,10 +6241,10 @@
             <a:r>
               <a:rPr sz="850" b="1" i="0">
                 <a:solidFill>
-                  <a:srgbClr val="1B5FA8"/>
-                </a:solidFill>
-              </a:rPr>
-              <a:t>▲ +0.30</a:t>
+                  <a:srgbClr val="4A6273"/>
+                </a:solidFill>
+              </a:rPr>
+              <a:t>sin cambio</a:t>
             </a:r>
           </a:p>
         </p:txBody>
@@ -6414,7 +6414,7 @@
                   <a:srgbClr val="4A6273"/>
                 </a:solidFill>
               </a:rPr>
-              <a:t>102.6%</a:t>
+              <a:t>102.7%</a:t>
             </a:r>
           </a:p>
         </p:txBody>
@@ -6427,8 +6427,8 @@
         </p:nvSpPr>
         <p:spPr>
           <a:xfrm>
-            <a:off x="12721132" y="7932420"/>
-            <a:ext cx="530352" cy="162763"/>
+            <a:off x="12626035" y="7923276"/>
+            <a:ext cx="722376" cy="171907"/>
           </a:xfrm>
           <a:prstGeom prst="rect">
             <a:avLst/>
@@ -6445,10 +6445,10 @@
             <a:r>
               <a:rPr sz="850" b="1" i="0">
                 <a:solidFill>
-                  <a:srgbClr val="1B5FA8"/>
-                </a:solidFill>
-              </a:rPr>
-              <a:t>▲ +0.10</a:t>
+                  <a:srgbClr val="4A6273"/>
+                </a:solidFill>
+              </a:rPr>
+              <a:t>sin cambio</a:t>
             </a:r>
           </a:p>
         </p:txBody>
@@ -6618,7 +6618,7 @@
                   <a:srgbClr val="4A6273"/>
                 </a:solidFill>
               </a:rPr>
-              <a:t>102.4%</a:t>
+              <a:t>102.3%</a:t>
             </a:r>
           </a:p>
         </p:txBody>
@@ -6631,8 +6631,8 @@
         </p:nvSpPr>
         <p:spPr>
           <a:xfrm>
-            <a:off x="12744907" y="8225028"/>
-            <a:ext cx="484632" cy="162763"/>
+            <a:off x="12626035" y="8215884"/>
+            <a:ext cx="722376" cy="171907"/>
           </a:xfrm>
           <a:prstGeom prst="rect">
             <a:avLst/>
@@ -6649,10 +6649,10 @@
             <a:r>
               <a:rPr sz="850" b="1" i="0">
                 <a:solidFill>
-                  <a:srgbClr val="B3541F"/>
-                </a:solidFill>
-              </a:rPr>
-              <a:t>▼ -0.10</a:t>
+                  <a:srgbClr val="4A6273"/>
+                </a:solidFill>
+              </a:rPr>
+              <a:t>sin cambio</a:t>
             </a:r>
           </a:p>
         </p:txBody>

--- a/mapa_editable.pptx
+++ b/mapa_editable.pptx
@@ -4126,7 +4126,7 @@
                   <a:srgbClr val="152633"/>
                 </a:solidFill>
               </a:rPr>
-              <a:t>53.5% llenado</a:t>
+              <a:t>53.4% llenado</a:t>
             </a:r>
           </a:p>
         </p:txBody>
@@ -4238,7 +4238,7 @@
                   <a:srgbClr val="152633"/>
                 </a:solidFill>
               </a:rPr>
-              <a:t>58.6% llenado</a:t>
+              <a:t>58.7% llenado</a:t>
             </a:r>
           </a:p>
         </p:txBody>
@@ -4339,7 +4339,7 @@
                   <a:srgbClr val="152633"/>
                 </a:solidFill>
               </a:rPr>
-              <a:t>69.6% llenado</a:t>
+              <a:t>69.7% llenado</a:t>
             </a:r>
           </a:p>
         </p:txBody>
@@ -4440,7 +4440,7 @@
                   <a:srgbClr val="152633"/>
                 </a:solidFill>
               </a:rPr>
-              <a:t>102.7% llenado</a:t>
+              <a:t>102.6% llenado</a:t>
             </a:r>
           </a:p>
         </p:txBody>
@@ -4552,7 +4552,7 @@
                   <a:srgbClr val="152633"/>
                 </a:solidFill>
               </a:rPr>
-              <a:t>102.3% llenado</a:t>
+              <a:t>102.2% llenado</a:t>
             </a:r>
           </a:p>
         </p:txBody>
@@ -5734,7 +5734,7 @@
                   <a:srgbClr val="152633"/>
                 </a:solidFill>
               </a:rPr>
-              <a:t>53.5%</a:t>
+              <a:t>53.4%</a:t>
             </a:r>
           </a:p>
         </p:txBody>
@@ -5815,8 +5815,8 @@
         </p:nvSpPr>
         <p:spPr>
           <a:xfrm>
-            <a:off x="12626035" y="7047280"/>
-            <a:ext cx="722376" cy="171907"/>
+            <a:off x="12744907" y="7056424"/>
+            <a:ext cx="484632" cy="162763"/>
           </a:xfrm>
           <a:prstGeom prst="rect">
             <a:avLst/>
@@ -5833,10 +5833,10 @@
             <a:r>
               <a:rPr sz="850" b="1" i="0">
                 <a:solidFill>
-                  <a:srgbClr val="4A6273"/>
-                </a:solidFill>
-              </a:rPr>
-              <a:t>sin cambio</a:t>
+                  <a:srgbClr val="B3541F"/>
+                </a:solidFill>
+              </a:rPr>
+              <a:t>▼ -0.10</a:t>
             </a:r>
           </a:p>
         </p:txBody>
@@ -5938,7 +5938,7 @@
                   <a:srgbClr val="152633"/>
                 </a:solidFill>
               </a:rPr>
-              <a:t>58.6%</a:t>
+              <a:t>58.7%</a:t>
             </a:r>
           </a:p>
         </p:txBody>
@@ -6019,8 +6019,8 @@
         </p:nvSpPr>
         <p:spPr>
           <a:xfrm>
-            <a:off x="12626035" y="7339888"/>
-            <a:ext cx="722376" cy="171907"/>
+            <a:off x="12721132" y="7349032"/>
+            <a:ext cx="530352" cy="162763"/>
           </a:xfrm>
           <a:prstGeom prst="rect">
             <a:avLst/>
@@ -6037,10 +6037,10 @@
             <a:r>
               <a:rPr sz="850" b="1" i="0">
                 <a:solidFill>
-                  <a:srgbClr val="4A6273"/>
-                </a:solidFill>
-              </a:rPr>
-              <a:t>sin cambio</a:t>
+                  <a:srgbClr val="1B5FA8"/>
+                </a:solidFill>
+              </a:rPr>
+              <a:t>▲ +0.10</a:t>
             </a:r>
           </a:p>
         </p:txBody>
@@ -6142,7 +6142,7 @@
                   <a:srgbClr val="152633"/>
                 </a:solidFill>
               </a:rPr>
-              <a:t>69.6%</a:t>
+              <a:t>69.7%</a:t>
             </a:r>
           </a:p>
         </p:txBody>
@@ -6223,8 +6223,8 @@
         </p:nvSpPr>
         <p:spPr>
           <a:xfrm>
-            <a:off x="12626035" y="7631582"/>
-            <a:ext cx="722376" cy="171907"/>
+            <a:off x="12721132" y="7640726"/>
+            <a:ext cx="530352" cy="162763"/>
           </a:xfrm>
           <a:prstGeom prst="rect">
             <a:avLst/>
@@ -6241,10 +6241,10 @@
             <a:r>
               <a:rPr sz="850" b="1" i="0">
                 <a:solidFill>
-                  <a:srgbClr val="4A6273"/>
-                </a:solidFill>
-              </a:rPr>
-              <a:t>sin cambio</a:t>
+                  <a:srgbClr val="1B5FA8"/>
+                </a:solidFill>
+              </a:rPr>
+              <a:t>▲ +0.10</a:t>
             </a:r>
           </a:p>
         </p:txBody>
@@ -6346,7 +6346,7 @@
                   <a:srgbClr val="152633"/>
                 </a:solidFill>
               </a:rPr>
-              <a:t>102.7%</a:t>
+              <a:t>102.6%</a:t>
             </a:r>
           </a:p>
         </p:txBody>
@@ -6427,8 +6427,8 @@
         </p:nvSpPr>
         <p:spPr>
           <a:xfrm>
-            <a:off x="12626035" y="7923276"/>
-            <a:ext cx="722376" cy="171907"/>
+            <a:off x="12744907" y="7932420"/>
+            <a:ext cx="484632" cy="162763"/>
           </a:xfrm>
           <a:prstGeom prst="rect">
             <a:avLst/>
@@ -6445,10 +6445,10 @@
             <a:r>
               <a:rPr sz="850" b="1" i="0">
                 <a:solidFill>
-                  <a:srgbClr val="4A6273"/>
-                </a:solidFill>
-              </a:rPr>
-              <a:t>sin cambio</a:t>
+                  <a:srgbClr val="B3541F"/>
+                </a:solidFill>
+              </a:rPr>
+              <a:t>▼ -0.10</a:t>
             </a:r>
           </a:p>
         </p:txBody>
@@ -6550,7 +6550,7 @@
                   <a:srgbClr val="152633"/>
                 </a:solidFill>
               </a:rPr>
-              <a:t>102.3%</a:t>
+              <a:t>102.2%</a:t>
             </a:r>
           </a:p>
         </p:txBody>
@@ -6631,8 +6631,8 @@
         </p:nvSpPr>
         <p:spPr>
           <a:xfrm>
-            <a:off x="12626035" y="8215884"/>
-            <a:ext cx="722376" cy="171907"/>
+            <a:off x="12744907" y="8225028"/>
+            <a:ext cx="484632" cy="162763"/>
           </a:xfrm>
           <a:prstGeom prst="rect">
             <a:avLst/>
@@ -6649,10 +6649,10 @@
             <a:r>
               <a:rPr sz="850" b="1" i="0">
                 <a:solidFill>
-                  <a:srgbClr val="4A6273"/>
-                </a:solidFill>
-              </a:rPr>
-              <a:t>sin cambio</a:t>
+                  <a:srgbClr val="B3541F"/>
+                </a:solidFill>
+              </a:rPr>
+              <a:t>▼ -0.10</a:t>
             </a:r>
           </a:p>
         </p:txBody>

--- a/mapa_editable.pptx
+++ b/mapa_editable.pptx
@@ -5530,7 +5530,7 @@
                   <a:srgbClr val="152633"/>
                 </a:solidFill>
               </a:rPr>
-              <a:t>Reporte anterior (15/10/2026)</a:t>
+              <a:t>Reporte anterior (16/10/2026)</a:t>
             </a:r>
           </a:p>
         </p:txBody>
@@ -5564,7 +5564,7 @@
                   <a:srgbClr val="152633"/>
                 </a:solidFill>
               </a:rPr>
-              <a:t>Reporte actual (16/10/2026)</a:t>
+              <a:t>Reporte actual (17/10/2026)</a:t>
             </a:r>
           </a:p>
         </p:txBody>
@@ -5802,7 +5802,7 @@
                   <a:srgbClr val="4A6273"/>
                 </a:solidFill>
               </a:rPr>
-              <a:t>53.5%</a:t>
+              <a:t>53.4%</a:t>
             </a:r>
           </a:p>
         </p:txBody>
@@ -5815,8 +5815,8 @@
         </p:nvSpPr>
         <p:spPr>
           <a:xfrm>
-            <a:off x="12744907" y="7056424"/>
-            <a:ext cx="484632" cy="162763"/>
+            <a:off x="12626035" y="7047280"/>
+            <a:ext cx="722376" cy="171907"/>
           </a:xfrm>
           <a:prstGeom prst="rect">
             <a:avLst/>
@@ -5833,10 +5833,10 @@
             <a:r>
               <a:rPr sz="850" b="1" i="0">
                 <a:solidFill>
-                  <a:srgbClr val="B3541F"/>
-                </a:solidFill>
-              </a:rPr>
-              <a:t>▼ -0.10</a:t>
+                  <a:srgbClr val="4A6273"/>
+                </a:solidFill>
+              </a:rPr>
+              <a:t>sin cambio</a:t>
             </a:r>
           </a:p>
         </p:txBody>
@@ -6006,7 +6006,7 @@
                   <a:srgbClr val="4A6273"/>
                 </a:solidFill>
               </a:rPr>
-              <a:t>58.6%</a:t>
+              <a:t>58.7%</a:t>
             </a:r>
           </a:p>
         </p:txBody>
@@ -6019,8 +6019,8 @@
         </p:nvSpPr>
         <p:spPr>
           <a:xfrm>
-            <a:off x="12721132" y="7349032"/>
-            <a:ext cx="530352" cy="162763"/>
+            <a:off x="12626035" y="7339888"/>
+            <a:ext cx="722376" cy="171907"/>
           </a:xfrm>
           <a:prstGeom prst="rect">
             <a:avLst/>
@@ -6037,10 +6037,10 @@
             <a:r>
               <a:rPr sz="850" b="1" i="0">
                 <a:solidFill>
-                  <a:srgbClr val="1B5FA8"/>
-                </a:solidFill>
-              </a:rPr>
-              <a:t>▲ +0.10</a:t>
+                  <a:srgbClr val="4A6273"/>
+                </a:solidFill>
+              </a:rPr>
+              <a:t>sin cambio</a:t>
             </a:r>
           </a:p>
         </p:txBody>
@@ -6210,7 +6210,7 @@
                   <a:srgbClr val="4A6273"/>
                 </a:solidFill>
               </a:rPr>
-              <a:t>69.6%</a:t>
+              <a:t>69.7%</a:t>
             </a:r>
           </a:p>
         </p:txBody>
@@ -6223,8 +6223,8 @@
         </p:nvSpPr>
         <p:spPr>
           <a:xfrm>
-            <a:off x="12721132" y="7640726"/>
-            <a:ext cx="530352" cy="162763"/>
+            <a:off x="12626035" y="7631582"/>
+            <a:ext cx="722376" cy="171907"/>
           </a:xfrm>
           <a:prstGeom prst="rect">
             <a:avLst/>
@@ -6241,10 +6241,10 @@
             <a:r>
               <a:rPr sz="850" b="1" i="0">
                 <a:solidFill>
-                  <a:srgbClr val="1B5FA8"/>
-                </a:solidFill>
-              </a:rPr>
-              <a:t>▲ +0.10</a:t>
+                  <a:srgbClr val="4A6273"/>
+                </a:solidFill>
+              </a:rPr>
+              <a:t>sin cambio</a:t>
             </a:r>
           </a:p>
         </p:txBody>
@@ -6414,7 +6414,7 @@
                   <a:srgbClr val="4A6273"/>
                 </a:solidFill>
               </a:rPr>
-              <a:t>102.7%</a:t>
+              <a:t>102.6%</a:t>
             </a:r>
           </a:p>
         </p:txBody>
@@ -6427,8 +6427,8 @@
         </p:nvSpPr>
         <p:spPr>
           <a:xfrm>
-            <a:off x="12744907" y="7932420"/>
-            <a:ext cx="484632" cy="162763"/>
+            <a:off x="12626035" y="7923276"/>
+            <a:ext cx="722376" cy="171907"/>
           </a:xfrm>
           <a:prstGeom prst="rect">
             <a:avLst/>
@@ -6445,10 +6445,10 @@
             <a:r>
               <a:rPr sz="850" b="1" i="0">
                 <a:solidFill>
-                  <a:srgbClr val="B3541F"/>
-                </a:solidFill>
-              </a:rPr>
-              <a:t>▼ -0.10</a:t>
+                  <a:srgbClr val="4A6273"/>
+                </a:solidFill>
+              </a:rPr>
+              <a:t>sin cambio</a:t>
             </a:r>
           </a:p>
         </p:txBody>
@@ -6618,7 +6618,7 @@
                   <a:srgbClr val="4A6273"/>
                 </a:solidFill>
               </a:rPr>
-              <a:t>102.3%</a:t>
+              <a:t>102.2%</a:t>
             </a:r>
           </a:p>
         </p:txBody>
@@ -6631,8 +6631,8 @@
         </p:nvSpPr>
         <p:spPr>
           <a:xfrm>
-            <a:off x="12744907" y="8225028"/>
-            <a:ext cx="484632" cy="162763"/>
+            <a:off x="12626035" y="8215884"/>
+            <a:ext cx="722376" cy="171907"/>
           </a:xfrm>
           <a:prstGeom prst="rect">
             <a:avLst/>
@@ -6649,10 +6649,10 @@
             <a:r>
               <a:rPr sz="850" b="1" i="0">
                 <a:solidFill>
-                  <a:srgbClr val="B3541F"/>
-                </a:solidFill>
-              </a:rPr>
-              <a:t>▼ -0.10</a:t>
+                  <a:srgbClr val="4A6273"/>
+                </a:solidFill>
+              </a:rPr>
+              <a:t>sin cambio</a:t>
             </a:r>
           </a:p>
         </p:txBody>

--- a/mapa_editable.pptx
+++ b/mapa_editable.pptx
@@ -4126,7 +4126,7 @@
                   <a:srgbClr val="152633"/>
                 </a:solidFill>
               </a:rPr>
-              <a:t>53.4% llenado</a:t>
+              <a:t>53.7% llenado</a:t>
             </a:r>
           </a:p>
         </p:txBody>
@@ -4238,7 +4238,7 @@
                   <a:srgbClr val="152633"/>
                 </a:solidFill>
               </a:rPr>
-              <a:t>58.7% llenado</a:t>
+              <a:t>59.1% llenado</a:t>
             </a:r>
           </a:p>
         </p:txBody>
@@ -4440,7 +4440,7 @@
                   <a:srgbClr val="152633"/>
                 </a:solidFill>
               </a:rPr>
-              <a:t>102.6% llenado</a:t>
+              <a:t>102.4% llenado</a:t>
             </a:r>
           </a:p>
         </p:txBody>
@@ -4552,7 +4552,7 @@
                   <a:srgbClr val="152633"/>
                 </a:solidFill>
               </a:rPr>
-              <a:t>102.2% llenado</a:t>
+              <a:t>102.3% llenado</a:t>
             </a:r>
           </a:p>
         </p:txBody>
@@ -5734,7 +5734,7 @@
                   <a:srgbClr val="152633"/>
                 </a:solidFill>
               </a:rPr>
-              <a:t>53.4%</a:t>
+              <a:t>53.7%</a:t>
             </a:r>
           </a:p>
         </p:txBody>
@@ -5815,8 +5815,8 @@
         </p:nvSpPr>
         <p:spPr>
           <a:xfrm>
-            <a:off x="12626035" y="7047280"/>
-            <a:ext cx="722376" cy="171907"/>
+            <a:off x="12721132" y="7056424"/>
+            <a:ext cx="530352" cy="162763"/>
           </a:xfrm>
           <a:prstGeom prst="rect">
             <a:avLst/>
@@ -5833,10 +5833,10 @@
             <a:r>
               <a:rPr sz="850" b="1" i="0">
                 <a:solidFill>
-                  <a:srgbClr val="4A6273"/>
-                </a:solidFill>
-              </a:rPr>
-              <a:t>sin cambio</a:t>
+                  <a:srgbClr val="1B5FA8"/>
+                </a:solidFill>
+              </a:rPr>
+              <a:t>▲ +0.30</a:t>
             </a:r>
           </a:p>
         </p:txBody>
@@ -5938,7 +5938,7 @@
                   <a:srgbClr val="152633"/>
                 </a:solidFill>
               </a:rPr>
-              <a:t>58.7%</a:t>
+              <a:t>59.1%</a:t>
             </a:r>
           </a:p>
         </p:txBody>
@@ -6019,8 +6019,8 @@
         </p:nvSpPr>
         <p:spPr>
           <a:xfrm>
-            <a:off x="12626035" y="7339888"/>
-            <a:ext cx="722376" cy="171907"/>
+            <a:off x="12721132" y="7349032"/>
+            <a:ext cx="530352" cy="162763"/>
           </a:xfrm>
           <a:prstGeom prst="rect">
             <a:avLst/>
@@ -6037,10 +6037,10 @@
             <a:r>
               <a:rPr sz="850" b="1" i="0">
                 <a:solidFill>
-                  <a:srgbClr val="4A6273"/>
-                </a:solidFill>
-              </a:rPr>
-              <a:t>sin cambio</a:t>
+                  <a:srgbClr val="1B5FA8"/>
+                </a:solidFill>
+              </a:rPr>
+              <a:t>▲ +0.40</a:t>
             </a:r>
           </a:p>
         </p:txBody>
@@ -6346,7 +6346,7 @@
                   <a:srgbClr val="152633"/>
                 </a:solidFill>
               </a:rPr>
-              <a:t>102.6%</a:t>
+              <a:t>102.4%</a:t>
             </a:r>
           </a:p>
         </p:txBody>
@@ -6427,8 +6427,8 @@
         </p:nvSpPr>
         <p:spPr>
           <a:xfrm>
-            <a:off x="12626035" y="7923276"/>
-            <a:ext cx="722376" cy="171907"/>
+            <a:off x="12744907" y="7932420"/>
+            <a:ext cx="484632" cy="162763"/>
           </a:xfrm>
           <a:prstGeom prst="rect">
             <a:avLst/>
@@ -6445,10 +6445,10 @@
             <a:r>
               <a:rPr sz="850" b="1" i="0">
                 <a:solidFill>
-                  <a:srgbClr val="4A6273"/>
-                </a:solidFill>
-              </a:rPr>
-              <a:t>sin cambio</a:t>
+                  <a:srgbClr val="B3541F"/>
+                </a:solidFill>
+              </a:rPr>
+              <a:t>▼ -0.20</a:t>
             </a:r>
           </a:p>
         </p:txBody>
@@ -6550,7 +6550,7 @@
                   <a:srgbClr val="152633"/>
                 </a:solidFill>
               </a:rPr>
-              <a:t>102.2%</a:t>
+              <a:t>102.3%</a:t>
             </a:r>
           </a:p>
         </p:txBody>
@@ -6631,8 +6631,8 @@
         </p:nvSpPr>
         <p:spPr>
           <a:xfrm>
-            <a:off x="12626035" y="8215884"/>
-            <a:ext cx="722376" cy="171907"/>
+            <a:off x="12721132" y="8225028"/>
+            <a:ext cx="530352" cy="162763"/>
           </a:xfrm>
           <a:prstGeom prst="rect">
             <a:avLst/>
@@ -6649,10 +6649,10 @@
             <a:r>
               <a:rPr sz="850" b="1" i="0">
                 <a:solidFill>
-                  <a:srgbClr val="4A6273"/>
-                </a:solidFill>
-              </a:rPr>
-              <a:t>sin cambio</a:t>
+                  <a:srgbClr val="1B5FA8"/>
+                </a:solidFill>
+              </a:rPr>
+              <a:t>▲ +0.10</a:t>
             </a:r>
           </a:p>
         </p:txBody>

--- a/mapa_editable.pptx
+++ b/mapa_editable.pptx
@@ -5530,7 +5530,7 @@
                   <a:srgbClr val="152633"/>
                 </a:solidFill>
               </a:rPr>
-              <a:t>Reporte anterior (16/10/2026)</a:t>
+              <a:t>Reporte anterior (17/10/2026)</a:t>
             </a:r>
           </a:p>
         </p:txBody>
@@ -5564,7 +5564,7 @@
                   <a:srgbClr val="152633"/>
                 </a:solidFill>
               </a:rPr>
-              <a:t>Reporte actual (17/10/2026)</a:t>
+              <a:t>Reporte actual (18/10/2026)</a:t>
             </a:r>
           </a:p>
         </p:txBody>
@@ -5802,7 +5802,7 @@
                   <a:srgbClr val="4A6273"/>
                 </a:solidFill>
               </a:rPr>
-              <a:t>53.4%</a:t>
+              <a:t>53.7%</a:t>
             </a:r>
           </a:p>
         </p:txBody>
@@ -5815,8 +5815,8 @@
         </p:nvSpPr>
         <p:spPr>
           <a:xfrm>
-            <a:off x="12721132" y="7056424"/>
-            <a:ext cx="530352" cy="162763"/>
+            <a:off x="12626035" y="7047280"/>
+            <a:ext cx="722376" cy="171907"/>
           </a:xfrm>
           <a:prstGeom prst="rect">
             <a:avLst/>
@@ -5833,10 +5833,10 @@
             <a:r>
               <a:rPr sz="850" b="1" i="0">
                 <a:solidFill>
-                  <a:srgbClr val="1B5FA8"/>
-                </a:solidFill>
-              </a:rPr>
-              <a:t>▲ +0.30</a:t>
+                  <a:srgbClr val="4A6273"/>
+                </a:solidFill>
+              </a:rPr>
+              <a:t>sin cambio</a:t>
             </a:r>
           </a:p>
         </p:txBody>
@@ -6006,7 +6006,7 @@
                   <a:srgbClr val="4A6273"/>
                 </a:solidFill>
               </a:rPr>
-              <a:t>58.7%</a:t>
+              <a:t>59.1%</a:t>
             </a:r>
           </a:p>
         </p:txBody>
@@ -6019,8 +6019,8 @@
         </p:nvSpPr>
         <p:spPr>
           <a:xfrm>
-            <a:off x="12721132" y="7349032"/>
-            <a:ext cx="530352" cy="162763"/>
+            <a:off x="12626035" y="7339888"/>
+            <a:ext cx="722376" cy="171907"/>
           </a:xfrm>
           <a:prstGeom prst="rect">
             <a:avLst/>
@@ -6037,10 +6037,10 @@
             <a:r>
               <a:rPr sz="850" b="1" i="0">
                 <a:solidFill>
-                  <a:srgbClr val="1B5FA8"/>
-                </a:solidFill>
-              </a:rPr>
-              <a:t>▲ +0.40</a:t>
+                  <a:srgbClr val="4A6273"/>
+                </a:solidFill>
+              </a:rPr>
+              <a:t>sin cambio</a:t>
             </a:r>
           </a:p>
         </p:txBody>
@@ -6414,7 +6414,7 @@
                   <a:srgbClr val="4A6273"/>
                 </a:solidFill>
               </a:rPr>
-              <a:t>102.6%</a:t>
+              <a:t>102.4%</a:t>
             </a:r>
           </a:p>
         </p:txBody>
@@ -6427,8 +6427,8 @@
         </p:nvSpPr>
         <p:spPr>
           <a:xfrm>
-            <a:off x="12744907" y="7932420"/>
-            <a:ext cx="484632" cy="162763"/>
+            <a:off x="12626035" y="7923276"/>
+            <a:ext cx="722376" cy="171907"/>
           </a:xfrm>
           <a:prstGeom prst="rect">
             <a:avLst/>
@@ -6445,10 +6445,10 @@
             <a:r>
               <a:rPr sz="850" b="1" i="0">
                 <a:solidFill>
-                  <a:srgbClr val="B3541F"/>
-                </a:solidFill>
-              </a:rPr>
-              <a:t>▼ -0.20</a:t>
+                  <a:srgbClr val="4A6273"/>
+                </a:solidFill>
+              </a:rPr>
+              <a:t>sin cambio</a:t>
             </a:r>
           </a:p>
         </p:txBody>
@@ -6618,7 +6618,7 @@
                   <a:srgbClr val="4A6273"/>
                 </a:solidFill>
               </a:rPr>
-              <a:t>102.2%</a:t>
+              <a:t>102.3%</a:t>
             </a:r>
           </a:p>
         </p:txBody>
@@ -6631,8 +6631,8 @@
         </p:nvSpPr>
         <p:spPr>
           <a:xfrm>
-            <a:off x="12721132" y="8225028"/>
-            <a:ext cx="530352" cy="162763"/>
+            <a:off x="12626035" y="8215884"/>
+            <a:ext cx="722376" cy="171907"/>
           </a:xfrm>
           <a:prstGeom prst="rect">
             <a:avLst/>
@@ -6649,10 +6649,10 @@
             <a:r>
               <a:rPr sz="850" b="1" i="0">
                 <a:solidFill>
-                  <a:srgbClr val="1B5FA8"/>
-                </a:solidFill>
-              </a:rPr>
-              <a:t>▲ +0.10</a:t>
+                  <a:srgbClr val="4A6273"/>
+                </a:solidFill>
+              </a:rPr>
+              <a:t>sin cambio</a:t>
             </a:r>
           </a:p>
         </p:txBody>

--- a/mapa_editable.pptx
+++ b/mapa_editable.pptx
@@ -4126,7 +4126,7 @@
                   <a:srgbClr val="152633"/>
                 </a:solidFill>
               </a:rPr>
-              <a:t>53.7% llenado</a:t>
+              <a:t>54.3% llenado</a:t>
             </a:r>
           </a:p>
         </p:txBody>
@@ -4238,7 +4238,7 @@
                   <a:srgbClr val="152633"/>
                 </a:solidFill>
               </a:rPr>
-              <a:t>59.1% llenado</a:t>
+              <a:t>59.7% llenado</a:t>
             </a:r>
           </a:p>
         </p:txBody>
@@ -4339,7 +4339,7 @@
                   <a:srgbClr val="152633"/>
                 </a:solidFill>
               </a:rPr>
-              <a:t>69.7% llenado</a:t>
+              <a:t>69.8% llenado</a:t>
             </a:r>
           </a:p>
         </p:txBody>
@@ -4440,7 +4440,7 @@
                   <a:srgbClr val="152633"/>
                 </a:solidFill>
               </a:rPr>
-              <a:t>102.4% llenado</a:t>
+              <a:t>102.3% llenado</a:t>
             </a:r>
           </a:p>
         </p:txBody>
@@ -4552,7 +4552,7 @@
                   <a:srgbClr val="152633"/>
                 </a:solidFill>
               </a:rPr>
-              <a:t>102.3% llenado</a:t>
+              <a:t>102.2% llenado</a:t>
             </a:r>
           </a:p>
         </p:txBody>
@@ -5734,7 +5734,7 @@
                   <a:srgbClr val="152633"/>
                 </a:solidFill>
               </a:rPr>
-              <a:t>53.7%</a:t>
+              <a:t>54.3%</a:t>
             </a:r>
           </a:p>
         </p:txBody>
@@ -5815,8 +5815,8 @@
         </p:nvSpPr>
         <p:spPr>
           <a:xfrm>
-            <a:off x="12626035" y="7047280"/>
-            <a:ext cx="722376" cy="171907"/>
+            <a:off x="12721132" y="7056424"/>
+            <a:ext cx="530352" cy="162763"/>
           </a:xfrm>
           <a:prstGeom prst="rect">
             <a:avLst/>
@@ -5833,10 +5833,10 @@
             <a:r>
               <a:rPr sz="850" b="1" i="0">
                 <a:solidFill>
-                  <a:srgbClr val="4A6273"/>
-                </a:solidFill>
-              </a:rPr>
-              <a:t>sin cambio</a:t>
+                  <a:srgbClr val="1B5FA8"/>
+                </a:solidFill>
+              </a:rPr>
+              <a:t>▲ +0.60</a:t>
             </a:r>
           </a:p>
         </p:txBody>
@@ -5938,7 +5938,7 @@
                   <a:srgbClr val="152633"/>
                 </a:solidFill>
               </a:rPr>
-              <a:t>59.1%</a:t>
+              <a:t>59.7%</a:t>
             </a:r>
           </a:p>
         </p:txBody>
@@ -6019,8 +6019,8 @@
         </p:nvSpPr>
         <p:spPr>
           <a:xfrm>
-            <a:off x="12626035" y="7339888"/>
-            <a:ext cx="722376" cy="171907"/>
+            <a:off x="12721132" y="7349032"/>
+            <a:ext cx="530352" cy="162763"/>
           </a:xfrm>
           <a:prstGeom prst="rect">
             <a:avLst/>
@@ -6037,10 +6037,10 @@
             <a:r>
               <a:rPr sz="850" b="1" i="0">
                 <a:solidFill>
-                  <a:srgbClr val="4A6273"/>
-                </a:solidFill>
-              </a:rPr>
-              <a:t>sin cambio</a:t>
+                  <a:srgbClr val="1B5FA8"/>
+                </a:solidFill>
+              </a:rPr>
+              <a:t>▲ +0.60</a:t>
             </a:r>
           </a:p>
         </p:txBody>
@@ -6142,7 +6142,7 @@
                   <a:srgbClr val="152633"/>
                 </a:solidFill>
               </a:rPr>
-              <a:t>69.7%</a:t>
+              <a:t>69.8%</a:t>
             </a:r>
           </a:p>
         </p:txBody>
@@ -6223,8 +6223,8 @@
         </p:nvSpPr>
         <p:spPr>
           <a:xfrm>
-            <a:off x="12626035" y="7631582"/>
-            <a:ext cx="722376" cy="171907"/>
+            <a:off x="12721132" y="7640726"/>
+            <a:ext cx="530352" cy="162763"/>
           </a:xfrm>
           <a:prstGeom prst="rect">
             <a:avLst/>
@@ -6241,10 +6241,10 @@
             <a:r>
               <a:rPr sz="850" b="1" i="0">
                 <a:solidFill>
-                  <a:srgbClr val="4A6273"/>
-                </a:solidFill>
-              </a:rPr>
-              <a:t>sin cambio</a:t>
+                  <a:srgbClr val="1B5FA8"/>
+                </a:solidFill>
+              </a:rPr>
+              <a:t>▲ +0.10</a:t>
             </a:r>
           </a:p>
         </p:txBody>
@@ -6346,7 +6346,7 @@
                   <a:srgbClr val="152633"/>
                 </a:solidFill>
               </a:rPr>
-              <a:t>102.4%</a:t>
+              <a:t>102.3%</a:t>
             </a:r>
           </a:p>
         </p:txBody>
@@ -6427,8 +6427,8 @@
         </p:nvSpPr>
         <p:spPr>
           <a:xfrm>
-            <a:off x="12626035" y="7923276"/>
-            <a:ext cx="722376" cy="171907"/>
+            <a:off x="12744907" y="7932420"/>
+            <a:ext cx="484632" cy="162763"/>
           </a:xfrm>
           <a:prstGeom prst="rect">
             <a:avLst/>
@@ -6445,10 +6445,10 @@
             <a:r>
               <a:rPr sz="850" b="1" i="0">
                 <a:solidFill>
-                  <a:srgbClr val="4A6273"/>
-                </a:solidFill>
-              </a:rPr>
-              <a:t>sin cambio</a:t>
+                  <a:srgbClr val="B3541F"/>
+                </a:solidFill>
+              </a:rPr>
+              <a:t>▼ -0.10</a:t>
             </a:r>
           </a:p>
         </p:txBody>
@@ -6550,7 +6550,7 @@
                   <a:srgbClr val="152633"/>
                 </a:solidFill>
               </a:rPr>
-              <a:t>102.3%</a:t>
+              <a:t>102.2%</a:t>
             </a:r>
           </a:p>
         </p:txBody>
@@ -6631,8 +6631,8 @@
         </p:nvSpPr>
         <p:spPr>
           <a:xfrm>
-            <a:off x="12626035" y="8215884"/>
-            <a:ext cx="722376" cy="171907"/>
+            <a:off x="12744907" y="8225028"/>
+            <a:ext cx="484632" cy="162763"/>
           </a:xfrm>
           <a:prstGeom prst="rect">
             <a:avLst/>
@@ -6649,10 +6649,10 @@
             <a:r>
               <a:rPr sz="850" b="1" i="0">
                 <a:solidFill>
-                  <a:srgbClr val="4A6273"/>
-                </a:solidFill>
-              </a:rPr>
-              <a:t>sin cambio</a:t>
+                  <a:srgbClr val="B3541F"/>
+                </a:solidFill>
+              </a:rPr>
+              <a:t>▼ -0.10</a:t>
             </a:r>
           </a:p>
         </p:txBody>

--- a/mapa_editable.pptx
+++ b/mapa_editable.pptx
@@ -5530,7 +5530,7 @@
                   <a:srgbClr val="152633"/>
                 </a:solidFill>
               </a:rPr>
-              <a:t>Reporte anterior (17/10/2026)</a:t>
+              <a:t>Reporte anterior (18/10/2026)</a:t>
             </a:r>
           </a:p>
         </p:txBody>
@@ -5564,7 +5564,7 @@
                   <a:srgbClr val="152633"/>
                 </a:solidFill>
               </a:rPr>
-              <a:t>Reporte actual (18/10/2026)</a:t>
+              <a:t>Reporte actual (19/10/2026)</a:t>
             </a:r>
           </a:p>
         </p:txBody>
@@ -5802,7 +5802,7 @@
                   <a:srgbClr val="4A6273"/>
                 </a:solidFill>
               </a:rPr>
-              <a:t>53.7%</a:t>
+              <a:t>54.3%</a:t>
             </a:r>
           </a:p>
         </p:txBody>
@@ -5815,8 +5815,8 @@
         </p:nvSpPr>
         <p:spPr>
           <a:xfrm>
-            <a:off x="12721132" y="7056424"/>
-            <a:ext cx="530352" cy="162763"/>
+            <a:off x="12626035" y="7047280"/>
+            <a:ext cx="722376" cy="171907"/>
           </a:xfrm>
           <a:prstGeom prst="rect">
             <a:avLst/>
@@ -5833,10 +5833,10 @@
             <a:r>
               <a:rPr sz="850" b="1" i="0">
                 <a:solidFill>
-                  <a:srgbClr val="1B5FA8"/>
-                </a:solidFill>
-              </a:rPr>
-              <a:t>▲ +0.60</a:t>
+                  <a:srgbClr val="4A6273"/>
+                </a:solidFill>
+              </a:rPr>
+              <a:t>sin cambio</a:t>
             </a:r>
           </a:p>
         </p:txBody>
@@ -6006,7 +6006,7 @@
                   <a:srgbClr val="4A6273"/>
                 </a:solidFill>
               </a:rPr>
-              <a:t>59.1%</a:t>
+              <a:t>59.7%</a:t>
             </a:r>
           </a:p>
         </p:txBody>
@@ -6019,8 +6019,8 @@
         </p:nvSpPr>
         <p:spPr>
           <a:xfrm>
-            <a:off x="12721132" y="7349032"/>
-            <a:ext cx="530352" cy="162763"/>
+            <a:off x="12626035" y="7339888"/>
+            <a:ext cx="722376" cy="171907"/>
           </a:xfrm>
           <a:prstGeom prst="rect">
             <a:avLst/>
@@ -6037,10 +6037,10 @@
             <a:r>
               <a:rPr sz="850" b="1" i="0">
                 <a:solidFill>
-                  <a:srgbClr val="1B5FA8"/>
-                </a:solidFill>
-              </a:rPr>
-              <a:t>▲ +0.60</a:t>
+                  <a:srgbClr val="4A6273"/>
+                </a:solidFill>
+              </a:rPr>
+              <a:t>sin cambio</a:t>
             </a:r>
           </a:p>
         </p:txBody>
@@ -6210,7 +6210,7 @@
                   <a:srgbClr val="4A6273"/>
                 </a:solidFill>
               </a:rPr>
-              <a:t>69.7%</a:t>
+              <a:t>69.8%</a:t>
             </a:r>
           </a:p>
         </p:txBody>
@@ -6223,8 +6223,8 @@
         </p:nvSpPr>
         <p:spPr>
           <a:xfrm>
-            <a:off x="12721132" y="7640726"/>
-            <a:ext cx="530352" cy="162763"/>
+            <a:off x="12626035" y="7631582"/>
+            <a:ext cx="722376" cy="171907"/>
           </a:xfrm>
           <a:prstGeom prst="rect">
             <a:avLst/>
@@ -6241,10 +6241,10 @@
             <a:r>
               <a:rPr sz="850" b="1" i="0">
                 <a:solidFill>
-                  <a:srgbClr val="1B5FA8"/>
-                </a:solidFill>
-              </a:rPr>
-              <a:t>▲ +0.10</a:t>
+                  <a:srgbClr val="4A6273"/>
+                </a:solidFill>
+              </a:rPr>
+              <a:t>sin cambio</a:t>
             </a:r>
           </a:p>
         </p:txBody>
@@ -6414,7 +6414,7 @@
                   <a:srgbClr val="4A6273"/>
                 </a:solidFill>
               </a:rPr>
-              <a:t>102.4%</a:t>
+              <a:t>102.3%</a:t>
             </a:r>
           </a:p>
         </p:txBody>
@@ -6427,8 +6427,8 @@
         </p:nvSpPr>
         <p:spPr>
           <a:xfrm>
-            <a:off x="12744907" y="7932420"/>
-            <a:ext cx="484632" cy="162763"/>
+            <a:off x="12626035" y="7923276"/>
+            <a:ext cx="722376" cy="171907"/>
           </a:xfrm>
           <a:prstGeom prst="rect">
             <a:avLst/>
@@ -6445,10 +6445,10 @@
             <a:r>
               <a:rPr sz="850" b="1" i="0">
                 <a:solidFill>
-                  <a:srgbClr val="B3541F"/>
-                </a:solidFill>
-              </a:rPr>
-              <a:t>▼ -0.10</a:t>
+                  <a:srgbClr val="4A6273"/>
+                </a:solidFill>
+              </a:rPr>
+              <a:t>sin cambio</a:t>
             </a:r>
           </a:p>
         </p:txBody>
@@ -6618,7 +6618,7 @@
                   <a:srgbClr val="4A6273"/>
                 </a:solidFill>
               </a:rPr>
-              <a:t>102.3%</a:t>
+              <a:t>102.2%</a:t>
             </a:r>
           </a:p>
         </p:txBody>
@@ -6631,8 +6631,8 @@
         </p:nvSpPr>
         <p:spPr>
           <a:xfrm>
-            <a:off x="12744907" y="8225028"/>
-            <a:ext cx="484632" cy="162763"/>
+            <a:off x="12626035" y="8215884"/>
+            <a:ext cx="722376" cy="171907"/>
           </a:xfrm>
           <a:prstGeom prst="rect">
             <a:avLst/>
@@ -6649,10 +6649,10 @@
             <a:r>
               <a:rPr sz="850" b="1" i="0">
                 <a:solidFill>
-                  <a:srgbClr val="B3541F"/>
-                </a:solidFill>
-              </a:rPr>
-              <a:t>▼ -0.10</a:t>
+                  <a:srgbClr val="4A6273"/>
+                </a:solidFill>
+              </a:rPr>
+              <a:t>sin cambio</a:t>
             </a:r>
           </a:p>
         </p:txBody>

--- a/mapa_editable.pptx
+++ b/mapa_editable.pptx
@@ -4126,7 +4126,7 @@
                   <a:srgbClr val="152633"/>
                 </a:solidFill>
               </a:rPr>
-              <a:t>54.3% llenado</a:t>
+              <a:t>54.8% llenado</a:t>
             </a:r>
           </a:p>
         </p:txBody>
@@ -4238,7 +4238,7 @@
                   <a:srgbClr val="152633"/>
                 </a:solidFill>
               </a:rPr>
-              <a:t>59.7% llenado</a:t>
+              <a:t>60.2% llenado</a:t>
             </a:r>
           </a:p>
         </p:txBody>
@@ -4339,7 +4339,7 @@
                   <a:srgbClr val="152633"/>
                 </a:solidFill>
               </a:rPr>
-              <a:t>69.8% llenado</a:t>
+              <a:t>70.0% llenado</a:t>
             </a:r>
           </a:p>
         </p:txBody>
@@ -4440,7 +4440,7 @@
                   <a:srgbClr val="152633"/>
                 </a:solidFill>
               </a:rPr>
-              <a:t>102.3% llenado</a:t>
+              <a:t>102.0% llenado</a:t>
             </a:r>
           </a:p>
         </p:txBody>
@@ -4552,7 +4552,7 @@
                   <a:srgbClr val="152633"/>
                 </a:solidFill>
               </a:rPr>
-              <a:t>102.2% llenado</a:t>
+              <a:t>102.0% llenado</a:t>
             </a:r>
           </a:p>
         </p:txBody>
@@ -5734,7 +5734,7 @@
                   <a:srgbClr val="152633"/>
                 </a:solidFill>
               </a:rPr>
-              <a:t>54.3%</a:t>
+              <a:t>54.8%</a:t>
             </a:r>
           </a:p>
         </p:txBody>
@@ -5815,8 +5815,8 @@
         </p:nvSpPr>
         <p:spPr>
           <a:xfrm>
-            <a:off x="12626035" y="7047280"/>
-            <a:ext cx="722376" cy="171907"/>
+            <a:off x="12721132" y="7056424"/>
+            <a:ext cx="530352" cy="162763"/>
           </a:xfrm>
           <a:prstGeom prst="rect">
             <a:avLst/>
@@ -5833,10 +5833,10 @@
             <a:r>
               <a:rPr sz="850" b="1" i="0">
                 <a:solidFill>
-                  <a:srgbClr val="4A6273"/>
-                </a:solidFill>
-              </a:rPr>
-              <a:t>sin cambio</a:t>
+                  <a:srgbClr val="1B5FA8"/>
+                </a:solidFill>
+              </a:rPr>
+              <a:t>▲ +0.50</a:t>
             </a:r>
           </a:p>
         </p:txBody>
@@ -5938,7 +5938,7 @@
                   <a:srgbClr val="152633"/>
                 </a:solidFill>
               </a:rPr>
-              <a:t>59.7%</a:t>
+              <a:t>60.2%</a:t>
             </a:r>
           </a:p>
         </p:txBody>
@@ -6019,8 +6019,8 @@
         </p:nvSpPr>
         <p:spPr>
           <a:xfrm>
-            <a:off x="12626035" y="7339888"/>
-            <a:ext cx="722376" cy="171907"/>
+            <a:off x="12721132" y="7349032"/>
+            <a:ext cx="530352" cy="162763"/>
           </a:xfrm>
           <a:prstGeom prst="rect">
             <a:avLst/>
@@ -6037,10 +6037,10 @@
             <a:r>
               <a:rPr sz="850" b="1" i="0">
                 <a:solidFill>
-                  <a:srgbClr val="4A6273"/>
-                </a:solidFill>
-              </a:rPr>
-              <a:t>sin cambio</a:t>
+                  <a:srgbClr val="1B5FA8"/>
+                </a:solidFill>
+              </a:rPr>
+              <a:t>▲ +0.50</a:t>
             </a:r>
           </a:p>
         </p:txBody>
@@ -6142,7 +6142,7 @@
                   <a:srgbClr val="152633"/>
                 </a:solidFill>
               </a:rPr>
-              <a:t>69.8%</a:t>
+              <a:t>70.0%</a:t>
             </a:r>
           </a:p>
         </p:txBody>
@@ -6223,8 +6223,8 @@
         </p:nvSpPr>
         <p:spPr>
           <a:xfrm>
-            <a:off x="12626035" y="7631582"/>
-            <a:ext cx="722376" cy="171907"/>
+            <a:off x="12721132" y="7640726"/>
+            <a:ext cx="530352" cy="162763"/>
           </a:xfrm>
           <a:prstGeom prst="rect">
             <a:avLst/>
@@ -6241,10 +6241,10 @@
             <a:r>
               <a:rPr sz="850" b="1" i="0">
                 <a:solidFill>
-                  <a:srgbClr val="4A6273"/>
-                </a:solidFill>
-              </a:rPr>
-              <a:t>sin cambio</a:t>
+                  <a:srgbClr val="1B5FA8"/>
+                </a:solidFill>
+              </a:rPr>
+              <a:t>▲ +0.20</a:t>
             </a:r>
           </a:p>
         </p:txBody>
@@ -6346,7 +6346,7 @@
                   <a:srgbClr val="152633"/>
                 </a:solidFill>
               </a:rPr>
-              <a:t>102.3%</a:t>
+              <a:t>102.0%</a:t>
             </a:r>
           </a:p>
         </p:txBody>
@@ -6427,8 +6427,8 @@
         </p:nvSpPr>
         <p:spPr>
           <a:xfrm>
-            <a:off x="12626035" y="7923276"/>
-            <a:ext cx="722376" cy="171907"/>
+            <a:off x="12744907" y="7932420"/>
+            <a:ext cx="484632" cy="162763"/>
           </a:xfrm>
           <a:prstGeom prst="rect">
             <a:avLst/>
@@ -6445,10 +6445,10 @@
             <a:r>
               <a:rPr sz="850" b="1" i="0">
                 <a:solidFill>
-                  <a:srgbClr val="4A6273"/>
-                </a:solidFill>
-              </a:rPr>
-              <a:t>sin cambio</a:t>
+                  <a:srgbClr val="B3541F"/>
+                </a:solidFill>
+              </a:rPr>
+              <a:t>▼ -0.30</a:t>
             </a:r>
           </a:p>
         </p:txBody>
@@ -6550,7 +6550,7 @@
                   <a:srgbClr val="152633"/>
                 </a:solidFill>
               </a:rPr>
-              <a:t>102.2%</a:t>
+              <a:t>102.0%</a:t>
             </a:r>
           </a:p>
         </p:txBody>
@@ -6631,8 +6631,8 @@
         </p:nvSpPr>
         <p:spPr>
           <a:xfrm>
-            <a:off x="12626035" y="8215884"/>
-            <a:ext cx="722376" cy="171907"/>
+            <a:off x="12744907" y="8225028"/>
+            <a:ext cx="484632" cy="162763"/>
           </a:xfrm>
           <a:prstGeom prst="rect">
             <a:avLst/>
@@ -6649,10 +6649,10 @@
             <a:r>
               <a:rPr sz="850" b="1" i="0">
                 <a:solidFill>
-                  <a:srgbClr val="4A6273"/>
-                </a:solidFill>
-              </a:rPr>
-              <a:t>sin cambio</a:t>
+                  <a:srgbClr val="B3541F"/>
+                </a:solidFill>
+              </a:rPr>
+              <a:t>▼ -0.20</a:t>
             </a:r>
           </a:p>
         </p:txBody>

--- a/mapa_editable.pptx
+++ b/mapa_editable.pptx
@@ -5530,7 +5530,7 @@
                   <a:srgbClr val="152633"/>
                 </a:solidFill>
               </a:rPr>
-              <a:t>Reporte anterior (18/10/2026)</a:t>
+              <a:t>Reporte anterior (19/10/2026)</a:t>
             </a:r>
           </a:p>
         </p:txBody>
@@ -5564,7 +5564,7 @@
                   <a:srgbClr val="152633"/>
                 </a:solidFill>
               </a:rPr>
-              <a:t>Reporte actual (19/10/2026)</a:t>
+              <a:t>Reporte actual (20/10/2026)</a:t>
             </a:r>
           </a:p>
         </p:txBody>
@@ -5802,7 +5802,7 @@
                   <a:srgbClr val="4A6273"/>
                 </a:solidFill>
               </a:rPr>
-              <a:t>54.3%</a:t>
+              <a:t>54.8%</a:t>
             </a:r>
           </a:p>
         </p:txBody>
@@ -5815,8 +5815,8 @@
         </p:nvSpPr>
         <p:spPr>
           <a:xfrm>
-            <a:off x="12721132" y="7056424"/>
-            <a:ext cx="530352" cy="162763"/>
+            <a:off x="12626035" y="7047280"/>
+            <a:ext cx="722376" cy="171907"/>
           </a:xfrm>
           <a:prstGeom prst="rect">
             <a:avLst/>
@@ -5833,10 +5833,10 @@
             <a:r>
               <a:rPr sz="850" b="1" i="0">
                 <a:solidFill>
-                  <a:srgbClr val="1B5FA8"/>
-                </a:solidFill>
-              </a:rPr>
-              <a:t>▲ +0.50</a:t>
+                  <a:srgbClr val="4A6273"/>
+                </a:solidFill>
+              </a:rPr>
+              <a:t>sin cambio</a:t>
             </a:r>
           </a:p>
         </p:txBody>
@@ -6006,7 +6006,7 @@
                   <a:srgbClr val="4A6273"/>
                 </a:solidFill>
               </a:rPr>
-              <a:t>59.7%</a:t>
+              <a:t>60.2%</a:t>
             </a:r>
           </a:p>
         </p:txBody>
@@ -6019,8 +6019,8 @@
         </p:nvSpPr>
         <p:spPr>
           <a:xfrm>
-            <a:off x="12721132" y="7349032"/>
-            <a:ext cx="530352" cy="162763"/>
+            <a:off x="12626035" y="7339888"/>
+            <a:ext cx="722376" cy="171907"/>
           </a:xfrm>
           <a:prstGeom prst="rect">
             <a:avLst/>
@@ -6037,10 +6037,10 @@
             <a:r>
               <a:rPr sz="850" b="1" i="0">
                 <a:solidFill>
-                  <a:srgbClr val="1B5FA8"/>
-                </a:solidFill>
-              </a:rPr>
-              <a:t>▲ +0.50</a:t>
+                  <a:srgbClr val="4A6273"/>
+                </a:solidFill>
+              </a:rPr>
+              <a:t>sin cambio</a:t>
             </a:r>
           </a:p>
         </p:txBody>
@@ -6210,7 +6210,7 @@
                   <a:srgbClr val="4A6273"/>
                 </a:solidFill>
               </a:rPr>
-              <a:t>69.8%</a:t>
+              <a:t>70.0%</a:t>
             </a:r>
           </a:p>
         </p:txBody>
@@ -6223,8 +6223,8 @@
         </p:nvSpPr>
         <p:spPr>
           <a:xfrm>
-            <a:off x="12721132" y="7640726"/>
-            <a:ext cx="530352" cy="162763"/>
+            <a:off x="12626035" y="7631582"/>
+            <a:ext cx="722376" cy="171907"/>
           </a:xfrm>
           <a:prstGeom prst="rect">
             <a:avLst/>
@@ -6241,10 +6241,10 @@
             <a:r>
               <a:rPr sz="850" b="1" i="0">
                 <a:solidFill>
-                  <a:srgbClr val="1B5FA8"/>
-                </a:solidFill>
-              </a:rPr>
-              <a:t>▲ +0.20</a:t>
+                  <a:srgbClr val="4A6273"/>
+                </a:solidFill>
+              </a:rPr>
+              <a:t>sin cambio</a:t>
             </a:r>
           </a:p>
         </p:txBody>
@@ -6414,7 +6414,7 @@
                   <a:srgbClr val="4A6273"/>
                 </a:solidFill>
               </a:rPr>
-              <a:t>102.3%</a:t>
+              <a:t>102.0%</a:t>
             </a:r>
           </a:p>
         </p:txBody>
@@ -6427,8 +6427,8 @@
         </p:nvSpPr>
         <p:spPr>
           <a:xfrm>
-            <a:off x="12744907" y="7932420"/>
-            <a:ext cx="484632" cy="162763"/>
+            <a:off x="12626035" y="7923276"/>
+            <a:ext cx="722376" cy="171907"/>
           </a:xfrm>
           <a:prstGeom prst="rect">
             <a:avLst/>
@@ -6445,10 +6445,10 @@
             <a:r>
               <a:rPr sz="850" b="1" i="0">
                 <a:solidFill>
-                  <a:srgbClr val="B3541F"/>
-                </a:solidFill>
-              </a:rPr>
-              <a:t>▼ -0.30</a:t>
+                  <a:srgbClr val="4A6273"/>
+                </a:solidFill>
+              </a:rPr>
+              <a:t>sin cambio</a:t>
             </a:r>
           </a:p>
         </p:txBody>
@@ -6618,7 +6618,7 @@
                   <a:srgbClr val="4A6273"/>
                 </a:solidFill>
               </a:rPr>
-              <a:t>102.2%</a:t>
+              <a:t>102.0%</a:t>
             </a:r>
           </a:p>
         </p:txBody>
@@ -6631,8 +6631,8 @@
         </p:nvSpPr>
         <p:spPr>
           <a:xfrm>
-            <a:off x="12744907" y="8225028"/>
-            <a:ext cx="484632" cy="162763"/>
+            <a:off x="12626035" y="8215884"/>
+            <a:ext cx="722376" cy="171907"/>
           </a:xfrm>
           <a:prstGeom prst="rect">
             <a:avLst/>
@@ -6649,10 +6649,10 @@
             <a:r>
               <a:rPr sz="850" b="1" i="0">
                 <a:solidFill>
-                  <a:srgbClr val="B3541F"/>
-                </a:solidFill>
-              </a:rPr>
-              <a:t>▼ -0.20</a:t>
+                  <a:srgbClr val="4A6273"/>
+                </a:solidFill>
+              </a:rPr>
+              <a:t>sin cambio</a:t>
             </a:r>
           </a:p>
         </p:txBody>

--- a/mapa_editable.pptx
+++ b/mapa_editable.pptx
@@ -4126,7 +4126,7 @@
                   <a:srgbClr val="152633"/>
                 </a:solidFill>
               </a:rPr>
-              <a:t>54.8% llenado</a:t>
+              <a:t>55.4% llenado</a:t>
             </a:r>
           </a:p>
         </p:txBody>
@@ -4238,7 +4238,7 @@
                   <a:srgbClr val="152633"/>
                 </a:solidFill>
               </a:rPr>
-              <a:t>60.2% llenado</a:t>
+              <a:t>61.0% llenado</a:t>
             </a:r>
           </a:p>
         </p:txBody>
@@ -4339,7 +4339,7 @@
                   <a:srgbClr val="152633"/>
                 </a:solidFill>
               </a:rPr>
-              <a:t>70.0% llenado</a:t>
+              <a:t>70.1% llenado</a:t>
             </a:r>
           </a:p>
         </p:txBody>
@@ -4440,7 +4440,7 @@
                   <a:srgbClr val="152633"/>
                 </a:solidFill>
               </a:rPr>
-              <a:t>102.0% llenado</a:t>
+              <a:t>101.9% llenado</a:t>
             </a:r>
           </a:p>
         </p:txBody>
@@ -4552,7 +4552,7 @@
                   <a:srgbClr val="152633"/>
                 </a:solidFill>
               </a:rPr>
-              <a:t>102.0% llenado</a:t>
+              <a:t>101.8% llenado</a:t>
             </a:r>
           </a:p>
         </p:txBody>
@@ -5734,7 +5734,7 @@
                   <a:srgbClr val="152633"/>
                 </a:solidFill>
               </a:rPr>
-              <a:t>54.8%</a:t>
+              <a:t>55.4%</a:t>
             </a:r>
           </a:p>
         </p:txBody>
@@ -5815,8 +5815,8 @@
         </p:nvSpPr>
         <p:spPr>
           <a:xfrm>
-            <a:off x="12626035" y="7047280"/>
-            <a:ext cx="722376" cy="171907"/>
+            <a:off x="12721132" y="7056424"/>
+            <a:ext cx="530352" cy="162763"/>
           </a:xfrm>
           <a:prstGeom prst="rect">
             <a:avLst/>
@@ -5833,10 +5833,10 @@
             <a:r>
               <a:rPr sz="850" b="1" i="0">
                 <a:solidFill>
-                  <a:srgbClr val="4A6273"/>
-                </a:solidFill>
-              </a:rPr>
-              <a:t>sin cambio</a:t>
+                  <a:srgbClr val="1B5FA8"/>
+                </a:solidFill>
+              </a:rPr>
+              <a:t>▲ +0.60</a:t>
             </a:r>
           </a:p>
         </p:txBody>
@@ -5938,7 +5938,7 @@
                   <a:srgbClr val="152633"/>
                 </a:solidFill>
               </a:rPr>
-              <a:t>60.2%</a:t>
+              <a:t>61.0%</a:t>
             </a:r>
           </a:p>
         </p:txBody>
@@ -6019,8 +6019,8 @@
         </p:nvSpPr>
         <p:spPr>
           <a:xfrm>
-            <a:off x="12626035" y="7339888"/>
-            <a:ext cx="722376" cy="171907"/>
+            <a:off x="12721132" y="7349032"/>
+            <a:ext cx="530352" cy="162763"/>
           </a:xfrm>
           <a:prstGeom prst="rect">
             <a:avLst/>
@@ -6037,10 +6037,10 @@
             <a:r>
               <a:rPr sz="850" b="1" i="0">
                 <a:solidFill>
-                  <a:srgbClr val="4A6273"/>
-                </a:solidFill>
-              </a:rPr>
-              <a:t>sin cambio</a:t>
+                  <a:srgbClr val="1B5FA8"/>
+                </a:solidFill>
+              </a:rPr>
+              <a:t>▲ +0.80</a:t>
             </a:r>
           </a:p>
         </p:txBody>
@@ -6142,7 +6142,7 @@
                   <a:srgbClr val="152633"/>
                 </a:solidFill>
               </a:rPr>
-              <a:t>70.0%</a:t>
+              <a:t>70.1%</a:t>
             </a:r>
           </a:p>
         </p:txBody>
@@ -6223,8 +6223,8 @@
         </p:nvSpPr>
         <p:spPr>
           <a:xfrm>
-            <a:off x="12626035" y="7631582"/>
-            <a:ext cx="722376" cy="171907"/>
+            <a:off x="12721132" y="7640726"/>
+            <a:ext cx="530352" cy="162763"/>
           </a:xfrm>
           <a:prstGeom prst="rect">
             <a:avLst/>
@@ -6241,10 +6241,10 @@
             <a:r>
               <a:rPr sz="850" b="1" i="0">
                 <a:solidFill>
-                  <a:srgbClr val="4A6273"/>
-                </a:solidFill>
-              </a:rPr>
-              <a:t>sin cambio</a:t>
+                  <a:srgbClr val="1B5FA8"/>
+                </a:solidFill>
+              </a:rPr>
+              <a:t>▲ +0.10</a:t>
             </a:r>
           </a:p>
         </p:txBody>
@@ -6346,7 +6346,7 @@
                   <a:srgbClr val="152633"/>
                 </a:solidFill>
               </a:rPr>
-              <a:t>102.0%</a:t>
+              <a:t>101.9%</a:t>
             </a:r>
           </a:p>
         </p:txBody>
@@ -6427,8 +6427,8 @@
         </p:nvSpPr>
         <p:spPr>
           <a:xfrm>
-            <a:off x="12626035" y="7923276"/>
-            <a:ext cx="722376" cy="171907"/>
+            <a:off x="12744907" y="7932420"/>
+            <a:ext cx="484632" cy="162763"/>
           </a:xfrm>
           <a:prstGeom prst="rect">
             <a:avLst/>
@@ -6445,10 +6445,10 @@
             <a:r>
               <a:rPr sz="850" b="1" i="0">
                 <a:solidFill>
-                  <a:srgbClr val="4A6273"/>
-                </a:solidFill>
-              </a:rPr>
-              <a:t>sin cambio</a:t>
+                  <a:srgbClr val="B3541F"/>
+                </a:solidFill>
+              </a:rPr>
+              <a:t>▼ -0.10</a:t>
             </a:r>
           </a:p>
         </p:txBody>
@@ -6550,7 +6550,7 @@
                   <a:srgbClr val="152633"/>
                 </a:solidFill>
               </a:rPr>
-              <a:t>102.0%</a:t>
+              <a:t>101.8%</a:t>
             </a:r>
           </a:p>
         </p:txBody>
@@ -6631,8 +6631,8 @@
         </p:nvSpPr>
         <p:spPr>
           <a:xfrm>
-            <a:off x="12626035" y="8215884"/>
-            <a:ext cx="722376" cy="171907"/>
+            <a:off x="12744907" y="8225028"/>
+            <a:ext cx="484632" cy="162763"/>
           </a:xfrm>
           <a:prstGeom prst="rect">
             <a:avLst/>
@@ -6649,10 +6649,10 @@
             <a:r>
               <a:rPr sz="850" b="1" i="0">
                 <a:solidFill>
-                  <a:srgbClr val="4A6273"/>
-                </a:solidFill>
-              </a:rPr>
-              <a:t>sin cambio</a:t>
+                  <a:srgbClr val="B3541F"/>
+                </a:solidFill>
+              </a:rPr>
+              <a:t>▼ -0.20</a:t>
             </a:r>
           </a:p>
         </p:txBody>

--- a/mapa_editable.pptx
+++ b/mapa_editable.pptx
@@ -5530,7 +5530,7 @@
                   <a:srgbClr val="152633"/>
                 </a:solidFill>
               </a:rPr>
-              <a:t>Reporte anterior (19/10/2026)</a:t>
+              <a:t>Reporte anterior (20/10/2026)</a:t>
             </a:r>
           </a:p>
         </p:txBody>
@@ -5564,7 +5564,7 @@
                   <a:srgbClr val="152633"/>
                 </a:solidFill>
               </a:rPr>
-              <a:t>Reporte actual (20/10/2026)</a:t>
+              <a:t>Reporte actual (21/10/2026)</a:t>
             </a:r>
           </a:p>
         </p:txBody>
@@ -5802,7 +5802,7 @@
                   <a:srgbClr val="4A6273"/>
                 </a:solidFill>
               </a:rPr>
-              <a:t>54.8%</a:t>
+              <a:t>55.4%</a:t>
             </a:r>
           </a:p>
         </p:txBody>
@@ -5815,8 +5815,8 @@
         </p:nvSpPr>
         <p:spPr>
           <a:xfrm>
-            <a:off x="12721132" y="7056424"/>
-            <a:ext cx="530352" cy="162763"/>
+            <a:off x="12626035" y="7047280"/>
+            <a:ext cx="722376" cy="171907"/>
           </a:xfrm>
           <a:prstGeom prst="rect">
             <a:avLst/>
@@ -5833,10 +5833,10 @@
             <a:r>
               <a:rPr sz="850" b="1" i="0">
                 <a:solidFill>
-                  <a:srgbClr val="1B5FA8"/>
-                </a:solidFill>
-              </a:rPr>
-              <a:t>▲ +0.60</a:t>
+                  <a:srgbClr val="4A6273"/>
+                </a:solidFill>
+              </a:rPr>
+              <a:t>sin cambio</a:t>
             </a:r>
           </a:p>
         </p:txBody>
@@ -6006,7 +6006,7 @@
                   <a:srgbClr val="4A6273"/>
                 </a:solidFill>
               </a:rPr>
-              <a:t>60.2%</a:t>
+              <a:t>61.0%</a:t>
             </a:r>
           </a:p>
         </p:txBody>
@@ -6019,8 +6019,8 @@
         </p:nvSpPr>
         <p:spPr>
           <a:xfrm>
-            <a:off x="12721132" y="7349032"/>
-            <a:ext cx="530352" cy="162763"/>
+            <a:off x="12626035" y="7339888"/>
+            <a:ext cx="722376" cy="171907"/>
           </a:xfrm>
           <a:prstGeom prst="rect">
             <a:avLst/>
@@ -6037,10 +6037,10 @@
             <a:r>
               <a:rPr sz="850" b="1" i="0">
                 <a:solidFill>
-                  <a:srgbClr val="1B5FA8"/>
-                </a:solidFill>
-              </a:rPr>
-              <a:t>▲ +0.80</a:t>
+                  <a:srgbClr val="4A6273"/>
+                </a:solidFill>
+              </a:rPr>
+              <a:t>sin cambio</a:t>
             </a:r>
           </a:p>
         </p:txBody>
@@ -6210,7 +6210,7 @@
                   <a:srgbClr val="4A6273"/>
                 </a:solidFill>
               </a:rPr>
-              <a:t>70.0%</a:t>
+              <a:t>70.1%</a:t>
             </a:r>
           </a:p>
         </p:txBody>
@@ -6223,8 +6223,8 @@
         </p:nvSpPr>
         <p:spPr>
           <a:xfrm>
-            <a:off x="12721132" y="7640726"/>
-            <a:ext cx="530352" cy="162763"/>
+            <a:off x="12626035" y="7631582"/>
+            <a:ext cx="722376" cy="171907"/>
           </a:xfrm>
           <a:prstGeom prst="rect">
             <a:avLst/>
@@ -6241,10 +6241,10 @@
             <a:r>
               <a:rPr sz="850" b="1" i="0">
                 <a:solidFill>
-                  <a:srgbClr val="1B5FA8"/>
-                </a:solidFill>
-              </a:rPr>
-              <a:t>▲ +0.10</a:t>
+                  <a:srgbClr val="4A6273"/>
+                </a:solidFill>
+              </a:rPr>
+              <a:t>sin cambio</a:t>
             </a:r>
           </a:p>
         </p:txBody>
@@ -6414,7 +6414,7 @@
                   <a:srgbClr val="4A6273"/>
                 </a:solidFill>
               </a:rPr>
-              <a:t>102.0%</a:t>
+              <a:t>101.9%</a:t>
             </a:r>
           </a:p>
         </p:txBody>
@@ -6427,8 +6427,8 @@
         </p:nvSpPr>
         <p:spPr>
           <a:xfrm>
-            <a:off x="12744907" y="7932420"/>
-            <a:ext cx="484632" cy="162763"/>
+            <a:off x="12626035" y="7923276"/>
+            <a:ext cx="722376" cy="171907"/>
           </a:xfrm>
           <a:prstGeom prst="rect">
             <a:avLst/>
@@ -6445,10 +6445,10 @@
             <a:r>
               <a:rPr sz="850" b="1" i="0">
                 <a:solidFill>
-                  <a:srgbClr val="B3541F"/>
-                </a:solidFill>
-              </a:rPr>
-              <a:t>▼ -0.10</a:t>
+                  <a:srgbClr val="4A6273"/>
+                </a:solidFill>
+              </a:rPr>
+              <a:t>sin cambio</a:t>
             </a:r>
           </a:p>
         </p:txBody>
@@ -6618,7 +6618,7 @@
                   <a:srgbClr val="4A6273"/>
                 </a:solidFill>
               </a:rPr>
-              <a:t>102.0%</a:t>
+              <a:t>101.8%</a:t>
             </a:r>
           </a:p>
         </p:txBody>
@@ -6631,8 +6631,8 @@
         </p:nvSpPr>
         <p:spPr>
           <a:xfrm>
-            <a:off x="12744907" y="8225028"/>
-            <a:ext cx="484632" cy="162763"/>
+            <a:off x="12626035" y="8215884"/>
+            <a:ext cx="722376" cy="171907"/>
           </a:xfrm>
           <a:prstGeom prst="rect">
             <a:avLst/>
@@ -6649,10 +6649,10 @@
             <a:r>
               <a:rPr sz="850" b="1" i="0">
                 <a:solidFill>
-                  <a:srgbClr val="B3541F"/>
-                </a:solidFill>
-              </a:rPr>
-              <a:t>▼ -0.20</a:t>
+                  <a:srgbClr val="4A6273"/>
+                </a:solidFill>
+              </a:rPr>
+              <a:t>sin cambio</a:t>
             </a:r>
           </a:p>
         </p:txBody>

--- a/mapa_editable.pptx
+++ b/mapa_editable.pptx
@@ -4126,7 +4126,7 @@
                   <a:srgbClr val="152633"/>
                 </a:solidFill>
               </a:rPr>
-              <a:t>55.4% llenado</a:t>
+              <a:t>55.8% llenado</a:t>
             </a:r>
           </a:p>
         </p:txBody>
@@ -4238,7 +4238,7 @@
                   <a:srgbClr val="152633"/>
                 </a:solidFill>
               </a:rPr>
-              <a:t>61.0% llenado</a:t>
+              <a:t>61.5% llenado</a:t>
             </a:r>
           </a:p>
         </p:txBody>
@@ -4339,7 +4339,7 @@
                   <a:srgbClr val="152633"/>
                 </a:solidFill>
               </a:rPr>
-              <a:t>70.1% llenado</a:t>
+              <a:t>70.2% llenado</a:t>
             </a:r>
           </a:p>
         </p:txBody>
@@ -4440,7 +4440,7 @@
                   <a:srgbClr val="152633"/>
                 </a:solidFill>
               </a:rPr>
-              <a:t>101.9% llenado</a:t>
+              <a:t>101.7% llenado</a:t>
             </a:r>
           </a:p>
         </p:txBody>
@@ -5734,7 +5734,7 @@
                   <a:srgbClr val="152633"/>
                 </a:solidFill>
               </a:rPr>
-              <a:t>55.4%</a:t>
+              <a:t>55.8%</a:t>
             </a:r>
           </a:p>
         </p:txBody>
@@ -5815,8 +5815,8 @@
         </p:nvSpPr>
         <p:spPr>
           <a:xfrm>
-            <a:off x="12626035" y="7047280"/>
-            <a:ext cx="722376" cy="171907"/>
+            <a:off x="12721132" y="7056424"/>
+            <a:ext cx="530352" cy="162763"/>
           </a:xfrm>
           <a:prstGeom prst="rect">
             <a:avLst/>
@@ -5833,10 +5833,10 @@
             <a:r>
               <a:rPr sz="850" b="1" i="0">
                 <a:solidFill>
-                  <a:srgbClr val="4A6273"/>
-                </a:solidFill>
-              </a:rPr>
-              <a:t>sin cambio</a:t>
+                  <a:srgbClr val="1B5FA8"/>
+                </a:solidFill>
+              </a:rPr>
+              <a:t>▲ +0.40</a:t>
             </a:r>
           </a:p>
         </p:txBody>
@@ -5938,7 +5938,7 @@
                   <a:srgbClr val="152633"/>
                 </a:solidFill>
               </a:rPr>
-              <a:t>61.0%</a:t>
+              <a:t>61.5%</a:t>
             </a:r>
           </a:p>
         </p:txBody>
@@ -6019,8 +6019,8 @@
         </p:nvSpPr>
         <p:spPr>
           <a:xfrm>
-            <a:off x="12626035" y="7339888"/>
-            <a:ext cx="722376" cy="171907"/>
+            <a:off x="12721132" y="7349032"/>
+            <a:ext cx="530352" cy="162763"/>
           </a:xfrm>
           <a:prstGeom prst="rect">
             <a:avLst/>
@@ -6037,10 +6037,10 @@
             <a:r>
               <a:rPr sz="850" b="1" i="0">
                 <a:solidFill>
-                  <a:srgbClr val="4A6273"/>
-                </a:solidFill>
-              </a:rPr>
-              <a:t>sin cambio</a:t>
+                  <a:srgbClr val="1B5FA8"/>
+                </a:solidFill>
+              </a:rPr>
+              <a:t>▲ +0.50</a:t>
             </a:r>
           </a:p>
         </p:txBody>
@@ -6142,7 +6142,7 @@
                   <a:srgbClr val="152633"/>
                 </a:solidFill>
               </a:rPr>
-              <a:t>70.1%</a:t>
+              <a:t>70.2%</a:t>
             </a:r>
           </a:p>
         </p:txBody>
@@ -6223,8 +6223,8 @@
         </p:nvSpPr>
         <p:spPr>
           <a:xfrm>
-            <a:off x="12626035" y="7631582"/>
-            <a:ext cx="722376" cy="171907"/>
+            <a:off x="12721132" y="7640726"/>
+            <a:ext cx="530352" cy="162763"/>
           </a:xfrm>
           <a:prstGeom prst="rect">
             <a:avLst/>
@@ -6241,10 +6241,10 @@
             <a:r>
               <a:rPr sz="850" b="1" i="0">
                 <a:solidFill>
-                  <a:srgbClr val="4A6273"/>
-                </a:solidFill>
-              </a:rPr>
-              <a:t>sin cambio</a:t>
+                  <a:srgbClr val="1B5FA8"/>
+                </a:solidFill>
+              </a:rPr>
+              <a:t>▲ +0.10</a:t>
             </a:r>
           </a:p>
         </p:txBody>
@@ -6346,7 +6346,7 @@
                   <a:srgbClr val="152633"/>
                 </a:solidFill>
               </a:rPr>
-              <a:t>101.9%</a:t>
+              <a:t>101.7%</a:t>
             </a:r>
           </a:p>
         </p:txBody>
@@ -6427,8 +6427,8 @@
         </p:nvSpPr>
         <p:spPr>
           <a:xfrm>
-            <a:off x="12626035" y="7923276"/>
-            <a:ext cx="722376" cy="171907"/>
+            <a:off x="12744907" y="7932420"/>
+            <a:ext cx="484632" cy="162763"/>
           </a:xfrm>
           <a:prstGeom prst="rect">
             <a:avLst/>
@@ -6445,10 +6445,10 @@
             <a:r>
               <a:rPr sz="850" b="1" i="0">
                 <a:solidFill>
-                  <a:srgbClr val="4A6273"/>
-                </a:solidFill>
-              </a:rPr>
-              <a:t>sin cambio</a:t>
+                  <a:srgbClr val="B3541F"/>
+                </a:solidFill>
+              </a:rPr>
+              <a:t>▼ -0.20</a:t>
             </a:r>
           </a:p>
         </p:txBody>

--- a/mapa_editable.pptx
+++ b/mapa_editable.pptx
@@ -5530,7 +5530,7 @@
                   <a:srgbClr val="152633"/>
                 </a:solidFill>
               </a:rPr>
-              <a:t>Reporte anterior (20/10/2026)</a:t>
+              <a:t>Reporte anterior (21/10/2026)</a:t>
             </a:r>
           </a:p>
         </p:txBody>
@@ -5564,7 +5564,7 @@
                   <a:srgbClr val="152633"/>
                 </a:solidFill>
               </a:rPr>
-              <a:t>Reporte actual (21/10/2026)</a:t>
+              <a:t>Reporte actual (22/10/2026)</a:t>
             </a:r>
           </a:p>
         </p:txBody>
@@ -5802,7 +5802,7 @@
                   <a:srgbClr val="4A6273"/>
                 </a:solidFill>
               </a:rPr>
-              <a:t>55.4%</a:t>
+              <a:t>55.8%</a:t>
             </a:r>
           </a:p>
         </p:txBody>
@@ -5815,8 +5815,8 @@
         </p:nvSpPr>
         <p:spPr>
           <a:xfrm>
-            <a:off x="12721132" y="7056424"/>
-            <a:ext cx="530352" cy="162763"/>
+            <a:off x="12626035" y="7047280"/>
+            <a:ext cx="722376" cy="171907"/>
           </a:xfrm>
           <a:prstGeom prst="rect">
             <a:avLst/>
@@ -5833,10 +5833,10 @@
             <a:r>
               <a:rPr sz="850" b="1" i="0">
                 <a:solidFill>
-                  <a:srgbClr val="1B5FA8"/>
-                </a:solidFill>
-              </a:rPr>
-              <a:t>▲ +0.40</a:t>
+                  <a:srgbClr val="4A6273"/>
+                </a:solidFill>
+              </a:rPr>
+              <a:t>sin cambio</a:t>
             </a:r>
           </a:p>
         </p:txBody>
@@ -6006,7 +6006,7 @@
                   <a:srgbClr val="4A6273"/>
                 </a:solidFill>
               </a:rPr>
-              <a:t>61.0%</a:t>
+              <a:t>61.5%</a:t>
             </a:r>
           </a:p>
         </p:txBody>
@@ -6019,8 +6019,8 @@
         </p:nvSpPr>
         <p:spPr>
           <a:xfrm>
-            <a:off x="12721132" y="7349032"/>
-            <a:ext cx="530352" cy="162763"/>
+            <a:off x="12626035" y="7339888"/>
+            <a:ext cx="722376" cy="171907"/>
           </a:xfrm>
           <a:prstGeom prst="rect">
             <a:avLst/>
@@ -6037,10 +6037,10 @@
             <a:r>
               <a:rPr sz="850" b="1" i="0">
                 <a:solidFill>
-                  <a:srgbClr val="1B5FA8"/>
-                </a:solidFill>
-              </a:rPr>
-              <a:t>▲ +0.50</a:t>
+                  <a:srgbClr val="4A6273"/>
+                </a:solidFill>
+              </a:rPr>
+              <a:t>sin cambio</a:t>
             </a:r>
           </a:p>
         </p:txBody>
@@ -6210,7 +6210,7 @@
                   <a:srgbClr val="4A6273"/>
                 </a:solidFill>
               </a:rPr>
-              <a:t>70.1%</a:t>
+              <a:t>70.2%</a:t>
             </a:r>
           </a:p>
         </p:txBody>
@@ -6223,8 +6223,8 @@
         </p:nvSpPr>
         <p:spPr>
           <a:xfrm>
-            <a:off x="12721132" y="7640726"/>
-            <a:ext cx="530352" cy="162763"/>
+            <a:off x="12626035" y="7631582"/>
+            <a:ext cx="722376" cy="171907"/>
           </a:xfrm>
           <a:prstGeom prst="rect">
             <a:avLst/>
@@ -6241,10 +6241,10 @@
             <a:r>
               <a:rPr sz="850" b="1" i="0">
                 <a:solidFill>
-                  <a:srgbClr val="1B5FA8"/>
-                </a:solidFill>
-              </a:rPr>
-              <a:t>▲ +0.10</a:t>
+                  <a:srgbClr val="4A6273"/>
+                </a:solidFill>
+              </a:rPr>
+              <a:t>sin cambio</a:t>
             </a:r>
           </a:p>
         </p:txBody>
@@ -6414,7 +6414,7 @@
                   <a:srgbClr val="4A6273"/>
                 </a:solidFill>
               </a:rPr>
-              <a:t>101.9%</a:t>
+              <a:t>101.7%</a:t>
             </a:r>
           </a:p>
         </p:txBody>
@@ -6427,8 +6427,8 @@
         </p:nvSpPr>
         <p:spPr>
           <a:xfrm>
-            <a:off x="12744907" y="7932420"/>
-            <a:ext cx="484632" cy="162763"/>
+            <a:off x="12626035" y="7923276"/>
+            <a:ext cx="722376" cy="171907"/>
           </a:xfrm>
           <a:prstGeom prst="rect">
             <a:avLst/>
@@ -6445,10 +6445,10 @@
             <a:r>
               <a:rPr sz="850" b="1" i="0">
                 <a:solidFill>
-                  <a:srgbClr val="B3541F"/>
-                </a:solidFill>
-              </a:rPr>
-              <a:t>▼ -0.20</a:t>
+                  <a:srgbClr val="4A6273"/>
+                </a:solidFill>
+              </a:rPr>
+              <a:t>sin cambio</a:t>
             </a:r>
           </a:p>
         </p:txBody>

--- a/mapa_editable.pptx
+++ b/mapa_editable.pptx
@@ -4126,7 +4126,7 @@
                   <a:srgbClr val="152633"/>
                 </a:solidFill>
               </a:rPr>
-              <a:t>55.8% llenado</a:t>
+              <a:t>56.3% llenado</a:t>
             </a:r>
           </a:p>
         </p:txBody>
@@ -4238,7 +4238,7 @@
                   <a:srgbClr val="152633"/>
                 </a:solidFill>
               </a:rPr>
-              <a:t>61.5% llenado</a:t>
+              <a:t>62.3% llenado</a:t>
             </a:r>
           </a:p>
         </p:txBody>
@@ -4339,7 +4339,7 @@
                   <a:srgbClr val="152633"/>
                 </a:solidFill>
               </a:rPr>
-              <a:t>70.2% llenado</a:t>
+              <a:t>70.6% llenado</a:t>
             </a:r>
           </a:p>
         </p:txBody>
@@ -4440,7 +4440,7 @@
                   <a:srgbClr val="152633"/>
                 </a:solidFill>
               </a:rPr>
-              <a:t>101.7% llenado</a:t>
+              <a:t>101.5% llenado</a:t>
             </a:r>
           </a:p>
         </p:txBody>
@@ -4552,7 +4552,7 @@
                   <a:srgbClr val="152633"/>
                 </a:solidFill>
               </a:rPr>
-              <a:t>101.8% llenado</a:t>
+              <a:t>101.3% llenado</a:t>
             </a:r>
           </a:p>
         </p:txBody>
@@ -5734,7 +5734,7 @@
                   <a:srgbClr val="152633"/>
                 </a:solidFill>
               </a:rPr>
-              <a:t>55.8%</a:t>
+              <a:t>56.3%</a:t>
             </a:r>
           </a:p>
         </p:txBody>
@@ -5815,8 +5815,8 @@
         </p:nvSpPr>
         <p:spPr>
           <a:xfrm>
-            <a:off x="12626035" y="7047280"/>
-            <a:ext cx="722376" cy="171907"/>
+            <a:off x="12721132" y="7056424"/>
+            <a:ext cx="530352" cy="162763"/>
           </a:xfrm>
           <a:prstGeom prst="rect">
             <a:avLst/>
@@ -5833,10 +5833,10 @@
             <a:r>
               <a:rPr sz="850" b="1" i="0">
                 <a:solidFill>
-                  <a:srgbClr val="4A6273"/>
-                </a:solidFill>
-              </a:rPr>
-              <a:t>sin cambio</a:t>
+                  <a:srgbClr val="1B5FA8"/>
+                </a:solidFill>
+              </a:rPr>
+              <a:t>▲ +0.50</a:t>
             </a:r>
           </a:p>
         </p:txBody>
@@ -5938,7 +5938,7 @@
                   <a:srgbClr val="152633"/>
                 </a:solidFill>
               </a:rPr>
-              <a:t>61.5%</a:t>
+              <a:t>62.3%</a:t>
             </a:r>
           </a:p>
         </p:txBody>
@@ -6019,8 +6019,8 @@
         </p:nvSpPr>
         <p:spPr>
           <a:xfrm>
-            <a:off x="12626035" y="7339888"/>
-            <a:ext cx="722376" cy="171907"/>
+            <a:off x="12721132" y="7349032"/>
+            <a:ext cx="530352" cy="162763"/>
           </a:xfrm>
           <a:prstGeom prst="rect">
             <a:avLst/>
@@ -6037,10 +6037,10 @@
             <a:r>
               <a:rPr sz="850" b="1" i="0">
                 <a:solidFill>
-                  <a:srgbClr val="4A6273"/>
-                </a:solidFill>
-              </a:rPr>
-              <a:t>sin cambio</a:t>
+                  <a:srgbClr val="1B5FA8"/>
+                </a:solidFill>
+              </a:rPr>
+              <a:t>▲ +0.80</a:t>
             </a:r>
           </a:p>
         </p:txBody>
@@ -6142,7 +6142,7 @@
                   <a:srgbClr val="152633"/>
                 </a:solidFill>
               </a:rPr>
-              <a:t>70.2%</a:t>
+              <a:t>70.6%</a:t>
             </a:r>
           </a:p>
         </p:txBody>
@@ -6223,8 +6223,8 @@
         </p:nvSpPr>
         <p:spPr>
           <a:xfrm>
-            <a:off x="12626035" y="7631582"/>
-            <a:ext cx="722376" cy="171907"/>
+            <a:off x="12721132" y="7640726"/>
+            <a:ext cx="530352" cy="162763"/>
           </a:xfrm>
           <a:prstGeom prst="rect">
             <a:avLst/>
@@ -6241,10 +6241,10 @@
             <a:r>
               <a:rPr sz="850" b="1" i="0">
                 <a:solidFill>
-                  <a:srgbClr val="4A6273"/>
-                </a:solidFill>
-              </a:rPr>
-              <a:t>sin cambio</a:t>
+                  <a:srgbClr val="1B5FA8"/>
+                </a:solidFill>
+              </a:rPr>
+              <a:t>▲ +0.40</a:t>
             </a:r>
           </a:p>
         </p:txBody>
@@ -6346,7 +6346,7 @@
                   <a:srgbClr val="152633"/>
                 </a:solidFill>
               </a:rPr>
-              <a:t>101.7%</a:t>
+              <a:t>101.5%</a:t>
             </a:r>
           </a:p>
         </p:txBody>
@@ -6427,8 +6427,8 @@
         </p:nvSpPr>
         <p:spPr>
           <a:xfrm>
-            <a:off x="12626035" y="7923276"/>
-            <a:ext cx="722376" cy="171907"/>
+            <a:off x="12744907" y="7932420"/>
+            <a:ext cx="484632" cy="162763"/>
           </a:xfrm>
           <a:prstGeom prst="rect">
             <a:avLst/>
@@ -6445,10 +6445,10 @@
             <a:r>
               <a:rPr sz="850" b="1" i="0">
                 <a:solidFill>
-                  <a:srgbClr val="4A6273"/>
-                </a:solidFill>
-              </a:rPr>
-              <a:t>sin cambio</a:t>
+                  <a:srgbClr val="B3541F"/>
+                </a:solidFill>
+              </a:rPr>
+              <a:t>▼ -0.20</a:t>
             </a:r>
           </a:p>
         </p:txBody>
@@ -6550,7 +6550,7 @@
                   <a:srgbClr val="152633"/>
                 </a:solidFill>
               </a:rPr>
-              <a:t>101.8%</a:t>
+              <a:t>101.3%</a:t>
             </a:r>
           </a:p>
         </p:txBody>
@@ -6631,8 +6631,8 @@
         </p:nvSpPr>
         <p:spPr>
           <a:xfrm>
-            <a:off x="12626035" y="8215884"/>
-            <a:ext cx="722376" cy="171907"/>
+            <a:off x="12744907" y="8225028"/>
+            <a:ext cx="484632" cy="162763"/>
           </a:xfrm>
           <a:prstGeom prst="rect">
             <a:avLst/>
@@ -6649,10 +6649,10 @@
             <a:r>
               <a:rPr sz="850" b="1" i="0">
                 <a:solidFill>
-                  <a:srgbClr val="4A6273"/>
-                </a:solidFill>
-              </a:rPr>
-              <a:t>sin cambio</a:t>
+                  <a:srgbClr val="B3541F"/>
+                </a:solidFill>
+              </a:rPr>
+              <a:t>▼ -0.50</a:t>
             </a:r>
           </a:p>
         </p:txBody>

--- a/mapa_editable.pptx
+++ b/mapa_editable.pptx
@@ -5530,7 +5530,7 @@
                   <a:srgbClr val="152633"/>
                 </a:solidFill>
               </a:rPr>
-              <a:t>Reporte anterior (21/10/2026)</a:t>
+              <a:t>Reporte anterior (22/10/2026)</a:t>
             </a:r>
           </a:p>
         </p:txBody>
@@ -5564,7 +5564,7 @@
                   <a:srgbClr val="152633"/>
                 </a:solidFill>
               </a:rPr>
-              <a:t>Reporte actual (22/10/2026)</a:t>
+              <a:t>Reporte actual (23/10/2026)</a:t>
             </a:r>
           </a:p>
         </p:txBody>
@@ -5802,7 +5802,7 @@
                   <a:srgbClr val="4A6273"/>
                 </a:solidFill>
               </a:rPr>
-              <a:t>55.8%</a:t>
+              <a:t>56.3%</a:t>
             </a:r>
           </a:p>
         </p:txBody>
@@ -5815,8 +5815,8 @@
         </p:nvSpPr>
         <p:spPr>
           <a:xfrm>
-            <a:off x="12721132" y="7056424"/>
-            <a:ext cx="530352" cy="162763"/>
+            <a:off x="12626035" y="7047280"/>
+            <a:ext cx="722376" cy="171907"/>
           </a:xfrm>
           <a:prstGeom prst="rect">
             <a:avLst/>
@@ -5833,10 +5833,10 @@
             <a:r>
               <a:rPr sz="850" b="1" i="0">
                 <a:solidFill>
-                  <a:srgbClr val="1B5FA8"/>
-                </a:solidFill>
-              </a:rPr>
-              <a:t>▲ +0.50</a:t>
+                  <a:srgbClr val="4A6273"/>
+                </a:solidFill>
+              </a:rPr>
+              <a:t>sin cambio</a:t>
             </a:r>
           </a:p>
         </p:txBody>
@@ -6006,7 +6006,7 @@
                   <a:srgbClr val="4A6273"/>
                 </a:solidFill>
               </a:rPr>
-              <a:t>61.5%</a:t>
+              <a:t>62.3%</a:t>
             </a:r>
           </a:p>
         </p:txBody>
@@ -6019,8 +6019,8 @@
         </p:nvSpPr>
         <p:spPr>
           <a:xfrm>
-            <a:off x="12721132" y="7349032"/>
-            <a:ext cx="530352" cy="162763"/>
+            <a:off x="12626035" y="7339888"/>
+            <a:ext cx="722376" cy="171907"/>
           </a:xfrm>
           <a:prstGeom prst="rect">
             <a:avLst/>
@@ -6037,10 +6037,10 @@
             <a:r>
               <a:rPr sz="850" b="1" i="0">
                 <a:solidFill>
-                  <a:srgbClr val="1B5FA8"/>
-                </a:solidFill>
-              </a:rPr>
-              <a:t>▲ +0.80</a:t>
+                  <a:srgbClr val="4A6273"/>
+                </a:solidFill>
+              </a:rPr>
+              <a:t>sin cambio</a:t>
             </a:r>
           </a:p>
         </p:txBody>
@@ -6210,7 +6210,7 @@
                   <a:srgbClr val="4A6273"/>
                 </a:solidFill>
               </a:rPr>
-              <a:t>70.2%</a:t>
+              <a:t>70.6%</a:t>
             </a:r>
           </a:p>
         </p:txBody>
@@ -6223,8 +6223,8 @@
         </p:nvSpPr>
         <p:spPr>
           <a:xfrm>
-            <a:off x="12721132" y="7640726"/>
-            <a:ext cx="530352" cy="162763"/>
+            <a:off x="12626035" y="7631582"/>
+            <a:ext cx="722376" cy="171907"/>
           </a:xfrm>
           <a:prstGeom prst="rect">
             <a:avLst/>
@@ -6241,10 +6241,10 @@
             <a:r>
               <a:rPr sz="850" b="1" i="0">
                 <a:solidFill>
-                  <a:srgbClr val="1B5FA8"/>
-                </a:solidFill>
-              </a:rPr>
-              <a:t>▲ +0.40</a:t>
+                  <a:srgbClr val="4A6273"/>
+                </a:solidFill>
+              </a:rPr>
+              <a:t>sin cambio</a:t>
             </a:r>
           </a:p>
         </p:txBody>
@@ -6414,7 +6414,7 @@
                   <a:srgbClr val="4A6273"/>
                 </a:solidFill>
               </a:rPr>
-              <a:t>101.7%</a:t>
+              <a:t>101.5%</a:t>
             </a:r>
           </a:p>
         </p:txBody>
@@ -6427,8 +6427,8 @@
         </p:nvSpPr>
         <p:spPr>
           <a:xfrm>
-            <a:off x="12744907" y="7932420"/>
-            <a:ext cx="484632" cy="162763"/>
+            <a:off x="12626035" y="7923276"/>
+            <a:ext cx="722376" cy="171907"/>
           </a:xfrm>
           <a:prstGeom prst="rect">
             <a:avLst/>
@@ -6445,10 +6445,10 @@
             <a:r>
               <a:rPr sz="850" b="1" i="0">
                 <a:solidFill>
-                  <a:srgbClr val="B3541F"/>
-                </a:solidFill>
-              </a:rPr>
-              <a:t>▼ -0.20</a:t>
+                  <a:srgbClr val="4A6273"/>
+                </a:solidFill>
+              </a:rPr>
+              <a:t>sin cambio</a:t>
             </a:r>
           </a:p>
         </p:txBody>
@@ -6618,7 +6618,7 @@
                   <a:srgbClr val="4A6273"/>
                 </a:solidFill>
               </a:rPr>
-              <a:t>101.8%</a:t>
+              <a:t>101.3%</a:t>
             </a:r>
           </a:p>
         </p:txBody>
@@ -6631,8 +6631,8 @@
         </p:nvSpPr>
         <p:spPr>
           <a:xfrm>
-            <a:off x="12744907" y="8225028"/>
-            <a:ext cx="484632" cy="162763"/>
+            <a:off x="12626035" y="8215884"/>
+            <a:ext cx="722376" cy="171907"/>
           </a:xfrm>
           <a:prstGeom prst="rect">
             <a:avLst/>
@@ -6649,10 +6649,10 @@
             <a:r>
               <a:rPr sz="850" b="1" i="0">
                 <a:solidFill>
-                  <a:srgbClr val="B3541F"/>
-                </a:solidFill>
-              </a:rPr>
-              <a:t>▼ -0.50</a:t>
+                  <a:srgbClr val="4A6273"/>
+                </a:solidFill>
+              </a:rPr>
+              <a:t>sin cambio</a:t>
             </a:r>
           </a:p>
         </p:txBody>

--- a/mapa_editable.pptx
+++ b/mapa_editable.pptx
@@ -4339,7 +4339,7 @@
                   <a:srgbClr val="152633"/>
                 </a:solidFill>
               </a:rPr>
-              <a:t>70.6% llenado</a:t>
+              <a:t>70.7% llenado</a:t>
             </a:r>
           </a:p>
         </p:txBody>
@@ -4552,7 +4552,7 @@
                   <a:srgbClr val="152633"/>
                 </a:solidFill>
               </a:rPr>
-              <a:t>101.3% llenado</a:t>
+              <a:t>101.1% llenado</a:t>
             </a:r>
           </a:p>
         </p:txBody>
@@ -6142,7 +6142,7 @@
                   <a:srgbClr val="152633"/>
                 </a:solidFill>
               </a:rPr>
-              <a:t>70.6%</a:t>
+              <a:t>70.7%</a:t>
             </a:r>
           </a:p>
         </p:txBody>
@@ -6223,8 +6223,8 @@
         </p:nvSpPr>
         <p:spPr>
           <a:xfrm>
-            <a:off x="12626035" y="7631582"/>
-            <a:ext cx="722376" cy="171907"/>
+            <a:off x="12721132" y="7640726"/>
+            <a:ext cx="530352" cy="162763"/>
           </a:xfrm>
           <a:prstGeom prst="rect">
             <a:avLst/>
@@ -6241,10 +6241,10 @@
             <a:r>
               <a:rPr sz="850" b="1" i="0">
                 <a:solidFill>
-                  <a:srgbClr val="4A6273"/>
-                </a:solidFill>
-              </a:rPr>
-              <a:t>sin cambio</a:t>
+                  <a:srgbClr val="1B5FA8"/>
+                </a:solidFill>
+              </a:rPr>
+              <a:t>▲ +0.10</a:t>
             </a:r>
           </a:p>
         </p:txBody>
@@ -6550,7 +6550,7 @@
                   <a:srgbClr val="152633"/>
                 </a:solidFill>
               </a:rPr>
-              <a:t>101.3%</a:t>
+              <a:t>101.1%</a:t>
             </a:r>
           </a:p>
         </p:txBody>
@@ -6631,8 +6631,8 @@
         </p:nvSpPr>
         <p:spPr>
           <a:xfrm>
-            <a:off x="12626035" y="8215884"/>
-            <a:ext cx="722376" cy="171907"/>
+            <a:off x="12744907" y="8225028"/>
+            <a:ext cx="484632" cy="162763"/>
           </a:xfrm>
           <a:prstGeom prst="rect">
             <a:avLst/>
@@ -6649,10 +6649,10 @@
             <a:r>
               <a:rPr sz="850" b="1" i="0">
                 <a:solidFill>
-                  <a:srgbClr val="4A6273"/>
-                </a:solidFill>
-              </a:rPr>
-              <a:t>sin cambio</a:t>
+                  <a:srgbClr val="B3541F"/>
+                </a:solidFill>
+              </a:rPr>
+              <a:t>▼ -0.20</a:t>
             </a:r>
           </a:p>
         </p:txBody>

--- a/mapa_editable.pptx
+++ b/mapa_editable.pptx
@@ -4126,7 +4126,7 @@
                   <a:srgbClr val="152633"/>
                 </a:solidFill>
               </a:rPr>
-              <a:t>56.3% llenado</a:t>
+              <a:t>57.3% llenado</a:t>
             </a:r>
           </a:p>
         </p:txBody>
@@ -4238,7 +4238,7 @@
                   <a:srgbClr val="152633"/>
                 </a:solidFill>
               </a:rPr>
-              <a:t>62.3% llenado</a:t>
+              <a:t>63.4% llenado</a:t>
             </a:r>
           </a:p>
         </p:txBody>
@@ -5734,7 +5734,7 @@
                   <a:srgbClr val="152633"/>
                 </a:solidFill>
               </a:rPr>
-              <a:t>56.3%</a:t>
+              <a:t>57.3%</a:t>
             </a:r>
           </a:p>
         </p:txBody>
@@ -5815,8 +5815,8 @@
         </p:nvSpPr>
         <p:spPr>
           <a:xfrm>
-            <a:off x="12626035" y="7047280"/>
-            <a:ext cx="722376" cy="171907"/>
+            <a:off x="12721132" y="7056424"/>
+            <a:ext cx="530352" cy="162763"/>
           </a:xfrm>
           <a:prstGeom prst="rect">
             <a:avLst/>
@@ -5833,10 +5833,10 @@
             <a:r>
               <a:rPr sz="850" b="1" i="0">
                 <a:solidFill>
-                  <a:srgbClr val="4A6273"/>
-                </a:solidFill>
-              </a:rPr>
-              <a:t>sin cambio</a:t>
+                  <a:srgbClr val="1B5FA8"/>
+                </a:solidFill>
+              </a:rPr>
+              <a:t>▲ +1.00</a:t>
             </a:r>
           </a:p>
         </p:txBody>
@@ -5938,7 +5938,7 @@
                   <a:srgbClr val="152633"/>
                 </a:solidFill>
               </a:rPr>
-              <a:t>62.3%</a:t>
+              <a:t>63.4%</a:t>
             </a:r>
           </a:p>
         </p:txBody>
@@ -6019,8 +6019,8 @@
         </p:nvSpPr>
         <p:spPr>
           <a:xfrm>
-            <a:off x="12626035" y="7339888"/>
-            <a:ext cx="722376" cy="171907"/>
+            <a:off x="12721132" y="7349032"/>
+            <a:ext cx="530352" cy="162763"/>
           </a:xfrm>
           <a:prstGeom prst="rect">
             <a:avLst/>
@@ -6037,10 +6037,10 @@
             <a:r>
               <a:rPr sz="850" b="1" i="0">
                 <a:solidFill>
-                  <a:srgbClr val="4A6273"/>
-                </a:solidFill>
-              </a:rPr>
-              <a:t>sin cambio</a:t>
+                  <a:srgbClr val="1B5FA8"/>
+                </a:solidFill>
+              </a:rPr>
+              <a:t>▲ +1.10</a:t>
             </a:r>
           </a:p>
         </p:txBody>

--- a/mapa_editable.pptx
+++ b/mapa_editable.pptx
@@ -5530,7 +5530,7 @@
                   <a:srgbClr val="152633"/>
                 </a:solidFill>
               </a:rPr>
-              <a:t>Reporte anterior (22/10/2026)</a:t>
+              <a:t>Reporte anterior (23/10/2026)</a:t>
             </a:r>
           </a:p>
         </p:txBody>
@@ -5564,7 +5564,7 @@
                   <a:srgbClr val="152633"/>
                 </a:solidFill>
               </a:rPr>
-              <a:t>Reporte actual (23/10/2026)</a:t>
+              <a:t>Reporte actual (24/10/2026)</a:t>
             </a:r>
           </a:p>
         </p:txBody>
@@ -5802,7 +5802,7 @@
                   <a:srgbClr val="4A6273"/>
                 </a:solidFill>
               </a:rPr>
-              <a:t>56.3%</a:t>
+              <a:t>57.3%</a:t>
             </a:r>
           </a:p>
         </p:txBody>
@@ -5815,8 +5815,8 @@
         </p:nvSpPr>
         <p:spPr>
           <a:xfrm>
-            <a:off x="12721132" y="7056424"/>
-            <a:ext cx="530352" cy="162763"/>
+            <a:off x="12626035" y="7047280"/>
+            <a:ext cx="722376" cy="171907"/>
           </a:xfrm>
           <a:prstGeom prst="rect">
             <a:avLst/>
@@ -5833,10 +5833,10 @@
             <a:r>
               <a:rPr sz="850" b="1" i="0">
                 <a:solidFill>
-                  <a:srgbClr val="1B5FA8"/>
-                </a:solidFill>
-              </a:rPr>
-              <a:t>▲ +1.00</a:t>
+                  <a:srgbClr val="4A6273"/>
+                </a:solidFill>
+              </a:rPr>
+              <a:t>sin cambio</a:t>
             </a:r>
           </a:p>
         </p:txBody>
@@ -6006,7 +6006,7 @@
                   <a:srgbClr val="4A6273"/>
                 </a:solidFill>
               </a:rPr>
-              <a:t>62.3%</a:t>
+              <a:t>63.4%</a:t>
             </a:r>
           </a:p>
         </p:txBody>
@@ -6019,8 +6019,8 @@
         </p:nvSpPr>
         <p:spPr>
           <a:xfrm>
-            <a:off x="12721132" y="7349032"/>
-            <a:ext cx="530352" cy="162763"/>
+            <a:off x="12626035" y="7339888"/>
+            <a:ext cx="722376" cy="171907"/>
           </a:xfrm>
           <a:prstGeom prst="rect">
             <a:avLst/>
@@ -6037,10 +6037,10 @@
             <a:r>
               <a:rPr sz="850" b="1" i="0">
                 <a:solidFill>
-                  <a:srgbClr val="1B5FA8"/>
-                </a:solidFill>
-              </a:rPr>
-              <a:t>▲ +1.10</a:t>
+                  <a:srgbClr val="4A6273"/>
+                </a:solidFill>
+              </a:rPr>
+              <a:t>sin cambio</a:t>
             </a:r>
           </a:p>
         </p:txBody>
@@ -6210,7 +6210,7 @@
                   <a:srgbClr val="4A6273"/>
                 </a:solidFill>
               </a:rPr>
-              <a:t>70.6%</a:t>
+              <a:t>70.7%</a:t>
             </a:r>
           </a:p>
         </p:txBody>
@@ -6223,8 +6223,8 @@
         </p:nvSpPr>
         <p:spPr>
           <a:xfrm>
-            <a:off x="12721132" y="7640726"/>
-            <a:ext cx="530352" cy="162763"/>
+            <a:off x="12626035" y="7631582"/>
+            <a:ext cx="722376" cy="171907"/>
           </a:xfrm>
           <a:prstGeom prst="rect">
             <a:avLst/>
@@ -6241,10 +6241,10 @@
             <a:r>
               <a:rPr sz="850" b="1" i="0">
                 <a:solidFill>
-                  <a:srgbClr val="1B5FA8"/>
-                </a:solidFill>
-              </a:rPr>
-              <a:t>▲ +0.10</a:t>
+                  <a:srgbClr val="4A6273"/>
+                </a:solidFill>
+              </a:rPr>
+              <a:t>sin cambio</a:t>
             </a:r>
           </a:p>
         </p:txBody>
@@ -6618,7 +6618,7 @@
                   <a:srgbClr val="4A6273"/>
                 </a:solidFill>
               </a:rPr>
-              <a:t>101.3%</a:t>
+              <a:t>101.1%</a:t>
             </a:r>
           </a:p>
         </p:txBody>
@@ -6631,8 +6631,8 @@
         </p:nvSpPr>
         <p:spPr>
           <a:xfrm>
-            <a:off x="12744907" y="8225028"/>
-            <a:ext cx="484632" cy="162763"/>
+            <a:off x="12626035" y="8215884"/>
+            <a:ext cx="722376" cy="171907"/>
           </a:xfrm>
           <a:prstGeom prst="rect">
             <a:avLst/>
@@ -6649,10 +6649,10 @@
             <a:r>
               <a:rPr sz="850" b="1" i="0">
                 <a:solidFill>
-                  <a:srgbClr val="B3541F"/>
-                </a:solidFill>
-              </a:rPr>
-              <a:t>▼ -0.20</a:t>
+                  <a:srgbClr val="4A6273"/>
+                </a:solidFill>
+              </a:rPr>
+              <a:t>sin cambio</a:t>
             </a:r>
           </a:p>
         </p:txBody>

--- a/mapa_editable.pptx
+++ b/mapa_editable.pptx
@@ -4126,7 +4126,7 @@
                   <a:srgbClr val="152633"/>
                 </a:solidFill>
               </a:rPr>
-              <a:t>57.3% llenado</a:t>
+              <a:t>58.1% llenado</a:t>
             </a:r>
           </a:p>
         </p:txBody>
@@ -4238,7 +4238,7 @@
                   <a:srgbClr val="152633"/>
                 </a:solidFill>
               </a:rPr>
-              <a:t>63.4% llenado</a:t>
+              <a:t>64.2% llenado</a:t>
             </a:r>
           </a:p>
         </p:txBody>
@@ -4339,7 +4339,7 @@
                   <a:srgbClr val="152633"/>
                 </a:solidFill>
               </a:rPr>
-              <a:t>70.7% llenado</a:t>
+              <a:t>71.1% llenado</a:t>
             </a:r>
           </a:p>
         </p:txBody>
@@ -4440,7 +4440,7 @@
                   <a:srgbClr val="152633"/>
                 </a:solidFill>
               </a:rPr>
-              <a:t>101.5% llenado</a:t>
+              <a:t>101.4% llenado</a:t>
             </a:r>
           </a:p>
         </p:txBody>
@@ -4552,7 +4552,7 @@
                   <a:srgbClr val="152633"/>
                 </a:solidFill>
               </a:rPr>
-              <a:t>101.1% llenado</a:t>
+              <a:t>101.0% llenado</a:t>
             </a:r>
           </a:p>
         </p:txBody>
@@ -5734,7 +5734,7 @@
                   <a:srgbClr val="152633"/>
                 </a:solidFill>
               </a:rPr>
-              <a:t>57.3%</a:t>
+              <a:t>58.1%</a:t>
             </a:r>
           </a:p>
         </p:txBody>
@@ -5815,8 +5815,8 @@
         </p:nvSpPr>
         <p:spPr>
           <a:xfrm>
-            <a:off x="12626035" y="7047280"/>
-            <a:ext cx="722376" cy="171907"/>
+            <a:off x="12721132" y="7056424"/>
+            <a:ext cx="530352" cy="162763"/>
           </a:xfrm>
           <a:prstGeom prst="rect">
             <a:avLst/>
@@ -5833,10 +5833,10 @@
             <a:r>
               <a:rPr sz="850" b="1" i="0">
                 <a:solidFill>
-                  <a:srgbClr val="4A6273"/>
-                </a:solidFill>
-              </a:rPr>
-              <a:t>sin cambio</a:t>
+                  <a:srgbClr val="1B5FA8"/>
+                </a:solidFill>
+              </a:rPr>
+              <a:t>▲ +0.80</a:t>
             </a:r>
           </a:p>
         </p:txBody>
@@ -5938,7 +5938,7 @@
                   <a:srgbClr val="152633"/>
                 </a:solidFill>
               </a:rPr>
-              <a:t>63.4%</a:t>
+              <a:t>64.2%</a:t>
             </a:r>
           </a:p>
         </p:txBody>
@@ -6019,8 +6019,8 @@
         </p:nvSpPr>
         <p:spPr>
           <a:xfrm>
-            <a:off x="12626035" y="7339888"/>
-            <a:ext cx="722376" cy="171907"/>
+            <a:off x="12721132" y="7349032"/>
+            <a:ext cx="530352" cy="162763"/>
           </a:xfrm>
           <a:prstGeom prst="rect">
             <a:avLst/>
@@ -6037,10 +6037,10 @@
             <a:r>
               <a:rPr sz="850" b="1" i="0">
                 <a:solidFill>
-                  <a:srgbClr val="4A6273"/>
-                </a:solidFill>
-              </a:rPr>
-              <a:t>sin cambio</a:t>
+                  <a:srgbClr val="1B5FA8"/>
+                </a:solidFill>
+              </a:rPr>
+              <a:t>▲ +0.80</a:t>
             </a:r>
           </a:p>
         </p:txBody>
@@ -6142,7 +6142,7 @@
                   <a:srgbClr val="152633"/>
                 </a:solidFill>
               </a:rPr>
-              <a:t>70.7%</a:t>
+              <a:t>71.1%</a:t>
             </a:r>
           </a:p>
         </p:txBody>
@@ -6223,8 +6223,8 @@
         </p:nvSpPr>
         <p:spPr>
           <a:xfrm>
-            <a:off x="12626035" y="7631582"/>
-            <a:ext cx="722376" cy="171907"/>
+            <a:off x="12721132" y="7640726"/>
+            <a:ext cx="530352" cy="162763"/>
           </a:xfrm>
           <a:prstGeom prst="rect">
             <a:avLst/>
@@ -6241,10 +6241,10 @@
             <a:r>
               <a:rPr sz="850" b="1" i="0">
                 <a:solidFill>
-                  <a:srgbClr val="4A6273"/>
-                </a:solidFill>
-              </a:rPr>
-              <a:t>sin cambio</a:t>
+                  <a:srgbClr val="1B5FA8"/>
+                </a:solidFill>
+              </a:rPr>
+              <a:t>▲ +0.40</a:t>
             </a:r>
           </a:p>
         </p:txBody>
@@ -6346,7 +6346,7 @@
                   <a:srgbClr val="152633"/>
                 </a:solidFill>
               </a:rPr>
-              <a:t>101.5%</a:t>
+              <a:t>101.4%</a:t>
             </a:r>
           </a:p>
         </p:txBody>
@@ -6427,8 +6427,8 @@
         </p:nvSpPr>
         <p:spPr>
           <a:xfrm>
-            <a:off x="12626035" y="7923276"/>
-            <a:ext cx="722376" cy="171907"/>
+            <a:off x="12744907" y="7932420"/>
+            <a:ext cx="484632" cy="162763"/>
           </a:xfrm>
           <a:prstGeom prst="rect">
             <a:avLst/>
@@ -6445,10 +6445,10 @@
             <a:r>
               <a:rPr sz="850" b="1" i="0">
                 <a:solidFill>
-                  <a:srgbClr val="4A6273"/>
-                </a:solidFill>
-              </a:rPr>
-              <a:t>sin cambio</a:t>
+                  <a:srgbClr val="B3541F"/>
+                </a:solidFill>
+              </a:rPr>
+              <a:t>▼ -0.10</a:t>
             </a:r>
           </a:p>
         </p:txBody>
@@ -6550,7 +6550,7 @@
                   <a:srgbClr val="152633"/>
                 </a:solidFill>
               </a:rPr>
-              <a:t>101.1%</a:t>
+              <a:t>101.0%</a:t>
             </a:r>
           </a:p>
         </p:txBody>
@@ -6631,8 +6631,8 @@
         </p:nvSpPr>
         <p:spPr>
           <a:xfrm>
-            <a:off x="12626035" y="8215884"/>
-            <a:ext cx="722376" cy="171907"/>
+            <a:off x="12744907" y="8225028"/>
+            <a:ext cx="484632" cy="162763"/>
           </a:xfrm>
           <a:prstGeom prst="rect">
             <a:avLst/>
@@ -6649,10 +6649,10 @@
             <a:r>
               <a:rPr sz="850" b="1" i="0">
                 <a:solidFill>
-                  <a:srgbClr val="4A6273"/>
-                </a:solidFill>
-              </a:rPr>
-              <a:t>sin cambio</a:t>
+                  <a:srgbClr val="B3541F"/>
+                </a:solidFill>
+              </a:rPr>
+              <a:t>▼ -0.10</a:t>
             </a:r>
           </a:p>
         </p:txBody>

--- a/mapa_editable.pptx
+++ b/mapa_editable.pptx
@@ -5530,7 +5530,7 @@
                   <a:srgbClr val="152633"/>
                 </a:solidFill>
               </a:rPr>
-              <a:t>Reporte anterior (23/10/2026)</a:t>
+              <a:t>Reporte anterior (24/10/2026)</a:t>
             </a:r>
           </a:p>
         </p:txBody>
@@ -5564,7 +5564,7 @@
                   <a:srgbClr val="152633"/>
                 </a:solidFill>
               </a:rPr>
-              <a:t>Reporte actual (24/10/2026)</a:t>
+              <a:t>Reporte actual (25/10/2026)</a:t>
             </a:r>
           </a:p>
         </p:txBody>
@@ -5802,7 +5802,7 @@
                   <a:srgbClr val="4A6273"/>
                 </a:solidFill>
               </a:rPr>
-              <a:t>57.3%</a:t>
+              <a:t>58.1%</a:t>
             </a:r>
           </a:p>
         </p:txBody>
@@ -5815,8 +5815,8 @@
         </p:nvSpPr>
         <p:spPr>
           <a:xfrm>
-            <a:off x="12721132" y="7056424"/>
-            <a:ext cx="530352" cy="162763"/>
+            <a:off x="12626035" y="7047280"/>
+            <a:ext cx="722376" cy="171907"/>
           </a:xfrm>
           <a:prstGeom prst="rect">
             <a:avLst/>
@@ -5833,10 +5833,10 @@
             <a:r>
               <a:rPr sz="850" b="1" i="0">
                 <a:solidFill>
-                  <a:srgbClr val="1B5FA8"/>
-                </a:solidFill>
-              </a:rPr>
-              <a:t>▲ +0.80</a:t>
+                  <a:srgbClr val="4A6273"/>
+                </a:solidFill>
+              </a:rPr>
+              <a:t>sin cambio</a:t>
             </a:r>
           </a:p>
         </p:txBody>
@@ -6006,7 +6006,7 @@
                   <a:srgbClr val="4A6273"/>
                 </a:solidFill>
               </a:rPr>
-              <a:t>63.4%</a:t>
+              <a:t>64.2%</a:t>
             </a:r>
           </a:p>
         </p:txBody>
@@ -6019,8 +6019,8 @@
         </p:nvSpPr>
         <p:spPr>
           <a:xfrm>
-            <a:off x="12721132" y="7349032"/>
-            <a:ext cx="530352" cy="162763"/>
+            <a:off x="12626035" y="7339888"/>
+            <a:ext cx="722376" cy="171907"/>
           </a:xfrm>
           <a:prstGeom prst="rect">
             <a:avLst/>
@@ -6037,10 +6037,10 @@
             <a:r>
               <a:rPr sz="850" b="1" i="0">
                 <a:solidFill>
-                  <a:srgbClr val="1B5FA8"/>
-                </a:solidFill>
-              </a:rPr>
-              <a:t>▲ +0.80</a:t>
+                  <a:srgbClr val="4A6273"/>
+                </a:solidFill>
+              </a:rPr>
+              <a:t>sin cambio</a:t>
             </a:r>
           </a:p>
         </p:txBody>
@@ -6210,7 +6210,7 @@
                   <a:srgbClr val="4A6273"/>
                 </a:solidFill>
               </a:rPr>
-              <a:t>70.7%</a:t>
+              <a:t>71.1%</a:t>
             </a:r>
           </a:p>
         </p:txBody>
@@ -6223,8 +6223,8 @@
         </p:nvSpPr>
         <p:spPr>
           <a:xfrm>
-            <a:off x="12721132" y="7640726"/>
-            <a:ext cx="530352" cy="162763"/>
+            <a:off x="12626035" y="7631582"/>
+            <a:ext cx="722376" cy="171907"/>
           </a:xfrm>
           <a:prstGeom prst="rect">
             <a:avLst/>
@@ -6241,10 +6241,10 @@
             <a:r>
               <a:rPr sz="850" b="1" i="0">
                 <a:solidFill>
-                  <a:srgbClr val="1B5FA8"/>
-                </a:solidFill>
-              </a:rPr>
-              <a:t>▲ +0.40</a:t>
+                  <a:srgbClr val="4A6273"/>
+                </a:solidFill>
+              </a:rPr>
+              <a:t>sin cambio</a:t>
             </a:r>
           </a:p>
         </p:txBody>
@@ -6414,7 +6414,7 @@
                   <a:srgbClr val="4A6273"/>
                 </a:solidFill>
               </a:rPr>
-              <a:t>101.5%</a:t>
+              <a:t>101.4%</a:t>
             </a:r>
           </a:p>
         </p:txBody>
@@ -6427,8 +6427,8 @@
         </p:nvSpPr>
         <p:spPr>
           <a:xfrm>
-            <a:off x="12744907" y="7932420"/>
-            <a:ext cx="484632" cy="162763"/>
+            <a:off x="12626035" y="7923276"/>
+            <a:ext cx="722376" cy="171907"/>
           </a:xfrm>
           <a:prstGeom prst="rect">
             <a:avLst/>
@@ -6445,10 +6445,10 @@
             <a:r>
               <a:rPr sz="850" b="1" i="0">
                 <a:solidFill>
-                  <a:srgbClr val="B3541F"/>
-                </a:solidFill>
-              </a:rPr>
-              <a:t>▼ -0.10</a:t>
+                  <a:srgbClr val="4A6273"/>
+                </a:solidFill>
+              </a:rPr>
+              <a:t>sin cambio</a:t>
             </a:r>
           </a:p>
         </p:txBody>
@@ -6618,7 +6618,7 @@
                   <a:srgbClr val="4A6273"/>
                 </a:solidFill>
               </a:rPr>
-              <a:t>101.1%</a:t>
+              <a:t>101.0%</a:t>
             </a:r>
           </a:p>
         </p:txBody>
@@ -6631,8 +6631,8 @@
         </p:nvSpPr>
         <p:spPr>
           <a:xfrm>
-            <a:off x="12744907" y="8225028"/>
-            <a:ext cx="484632" cy="162763"/>
+            <a:off x="12626035" y="8215884"/>
+            <a:ext cx="722376" cy="171907"/>
           </a:xfrm>
           <a:prstGeom prst="rect">
             <a:avLst/>
@@ -6649,10 +6649,10 @@
             <a:r>
               <a:rPr sz="850" b="1" i="0">
                 <a:solidFill>
-                  <a:srgbClr val="B3541F"/>
-                </a:solidFill>
-              </a:rPr>
-              <a:t>▼ -0.10</a:t>
+                  <a:srgbClr val="4A6273"/>
+                </a:solidFill>
+              </a:rPr>
+              <a:t>sin cambio</a:t>
             </a:r>
           </a:p>
         </p:txBody>

--- a/mapa_editable.pptx
+++ b/mapa_editable.pptx
@@ -4126,7 +4126,7 @@
                   <a:srgbClr val="152633"/>
                 </a:solidFill>
               </a:rPr>
-              <a:t>58.1% llenado</a:t>
+              <a:t>58.9% llenado</a:t>
             </a:r>
           </a:p>
         </p:txBody>
@@ -4238,7 +4238,7 @@
                   <a:srgbClr val="152633"/>
                 </a:solidFill>
               </a:rPr>
-              <a:t>64.2% llenado</a:t>
+              <a:t>64.7% llenado</a:t>
             </a:r>
           </a:p>
         </p:txBody>
@@ -4339,7 +4339,7 @@
                   <a:srgbClr val="152633"/>
                 </a:solidFill>
               </a:rPr>
-              <a:t>71.1% llenado</a:t>
+              <a:t>71.4% llenado</a:t>
             </a:r>
           </a:p>
         </p:txBody>
@@ -5734,7 +5734,7 @@
                   <a:srgbClr val="152633"/>
                 </a:solidFill>
               </a:rPr>
-              <a:t>58.1%</a:t>
+              <a:t>58.9%</a:t>
             </a:r>
           </a:p>
         </p:txBody>
@@ -5815,8 +5815,8 @@
         </p:nvSpPr>
         <p:spPr>
           <a:xfrm>
-            <a:off x="12626035" y="7047280"/>
-            <a:ext cx="722376" cy="171907"/>
+            <a:off x="12721132" y="7056424"/>
+            <a:ext cx="530352" cy="162763"/>
           </a:xfrm>
           <a:prstGeom prst="rect">
             <a:avLst/>
@@ -5833,10 +5833,10 @@
             <a:r>
               <a:rPr sz="850" b="1" i="0">
                 <a:solidFill>
-                  <a:srgbClr val="4A6273"/>
-                </a:solidFill>
-              </a:rPr>
-              <a:t>sin cambio</a:t>
+                  <a:srgbClr val="1B5FA8"/>
+                </a:solidFill>
+              </a:rPr>
+              <a:t>▲ +0.80</a:t>
             </a:r>
           </a:p>
         </p:txBody>
@@ -5938,7 +5938,7 @@
                   <a:srgbClr val="152633"/>
                 </a:solidFill>
               </a:rPr>
-              <a:t>64.2%</a:t>
+              <a:t>64.7%</a:t>
             </a:r>
           </a:p>
         </p:txBody>
@@ -6019,8 +6019,8 @@
         </p:nvSpPr>
         <p:spPr>
           <a:xfrm>
-            <a:off x="12626035" y="7339888"/>
-            <a:ext cx="722376" cy="171907"/>
+            <a:off x="12721132" y="7349032"/>
+            <a:ext cx="530352" cy="162763"/>
           </a:xfrm>
           <a:prstGeom prst="rect">
             <a:avLst/>
@@ -6037,10 +6037,10 @@
             <a:r>
               <a:rPr sz="850" b="1" i="0">
                 <a:solidFill>
-                  <a:srgbClr val="4A6273"/>
-                </a:solidFill>
-              </a:rPr>
-              <a:t>sin cambio</a:t>
+                  <a:srgbClr val="1B5FA8"/>
+                </a:solidFill>
+              </a:rPr>
+              <a:t>▲ +0.50</a:t>
             </a:r>
           </a:p>
         </p:txBody>
@@ -6142,7 +6142,7 @@
                   <a:srgbClr val="152633"/>
                 </a:solidFill>
               </a:rPr>
-              <a:t>71.1%</a:t>
+              <a:t>71.4%</a:t>
             </a:r>
           </a:p>
         </p:txBody>
@@ -6223,8 +6223,8 @@
         </p:nvSpPr>
         <p:spPr>
           <a:xfrm>
-            <a:off x="12626035" y="7631582"/>
-            <a:ext cx="722376" cy="171907"/>
+            <a:off x="12721132" y="7640726"/>
+            <a:ext cx="530352" cy="162763"/>
           </a:xfrm>
           <a:prstGeom prst="rect">
             <a:avLst/>
@@ -6241,10 +6241,10 @@
             <a:r>
               <a:rPr sz="850" b="1" i="0">
                 <a:solidFill>
-                  <a:srgbClr val="4A6273"/>
-                </a:solidFill>
-              </a:rPr>
-              <a:t>sin cambio</a:t>
+                  <a:srgbClr val="1B5FA8"/>
+                </a:solidFill>
+              </a:rPr>
+              <a:t>▲ +0.30</a:t>
             </a:r>
           </a:p>
         </p:txBody>

--- a/mapa_editable.pptx
+++ b/mapa_editable.pptx
@@ -4126,7 +4126,7 @@
                   <a:srgbClr val="152633"/>
                 </a:solidFill>
               </a:rPr>
-              <a:t>58.9% llenado</a:t>
+              <a:t>60.1% llenado</a:t>
             </a:r>
           </a:p>
         </p:txBody>
@@ -4238,7 +4238,7 @@
                   <a:srgbClr val="152633"/>
                 </a:solidFill>
               </a:rPr>
-              <a:t>64.7% llenado</a:t>
+              <a:t>65.2% llenado</a:t>
             </a:r>
           </a:p>
         </p:txBody>
@@ -4339,7 +4339,7 @@
                   <a:srgbClr val="152633"/>
                 </a:solidFill>
               </a:rPr>
-              <a:t>71.4% llenado</a:t>
+              <a:t>71.6% llenado</a:t>
             </a:r>
           </a:p>
         </p:txBody>
@@ -4440,7 +4440,7 @@
                   <a:srgbClr val="152633"/>
                 </a:solidFill>
               </a:rPr>
-              <a:t>101.4% llenado</a:t>
+              <a:t>101.3% llenado</a:t>
             </a:r>
           </a:p>
         </p:txBody>
@@ -4552,7 +4552,7 @@
                   <a:srgbClr val="152633"/>
                 </a:solidFill>
               </a:rPr>
-              <a:t>101.0% llenado</a:t>
+              <a:t>100.9% llenado</a:t>
             </a:r>
           </a:p>
         </p:txBody>
@@ -5530,7 +5530,7 @@
                   <a:srgbClr val="152633"/>
                 </a:solidFill>
               </a:rPr>
-              <a:t>Reporte anterior (24/10/2026)</a:t>
+              <a:t>Reporte anterior (25/10/2026)</a:t>
             </a:r>
           </a:p>
         </p:txBody>
@@ -5564,7 +5564,7 @@
                   <a:srgbClr val="152633"/>
                 </a:solidFill>
               </a:rPr>
-              <a:t>Reporte actual (25/10/2026)</a:t>
+              <a:t>Reporte actual (26/10/2026)</a:t>
             </a:r>
           </a:p>
         </p:txBody>
@@ -5734,7 +5734,7 @@
                   <a:srgbClr val="152633"/>
                 </a:solidFill>
               </a:rPr>
-              <a:t>58.9%</a:t>
+              <a:t>60.1%</a:t>
             </a:r>
           </a:p>
         </p:txBody>
@@ -5802,7 +5802,7 @@
                   <a:srgbClr val="4A6273"/>
                 </a:solidFill>
               </a:rPr>
-              <a:t>58.1%</a:t>
+              <a:t>58.9%</a:t>
             </a:r>
           </a:p>
         </p:txBody>
@@ -5836,7 +5836,7 @@
                   <a:srgbClr val="1B5FA8"/>
                 </a:solidFill>
               </a:rPr>
-              <a:t>▲ +0.80</a:t>
+              <a:t>▲ +1.20</a:t>
             </a:r>
           </a:p>
         </p:txBody>
@@ -5938,7 +5938,7 @@
                   <a:srgbClr val="152633"/>
                 </a:solidFill>
               </a:rPr>
-              <a:t>64.7%</a:t>
+              <a:t>65.2%</a:t>
             </a:r>
           </a:p>
         </p:txBody>
@@ -6006,7 +6006,7 @@
                   <a:srgbClr val="4A6273"/>
                 </a:solidFill>
               </a:rPr>
-              <a:t>64.2%</a:t>
+              <a:t>64.7%</a:t>
             </a:r>
           </a:p>
         </p:txBody>
@@ -6142,7 +6142,7 @@
                   <a:srgbClr val="152633"/>
                 </a:solidFill>
               </a:rPr>
-              <a:t>71.4%</a:t>
+              <a:t>71.6%</a:t>
             </a:r>
           </a:p>
         </p:txBody>
@@ -6210,7 +6210,7 @@
                   <a:srgbClr val="4A6273"/>
                 </a:solidFill>
               </a:rPr>
-              <a:t>71.1%</a:t>
+              <a:t>71.4%</a:t>
             </a:r>
           </a:p>
         </p:txBody>
@@ -6244,7 +6244,7 @@
                   <a:srgbClr val="1B5FA8"/>
                 </a:solidFill>
               </a:rPr>
-              <a:t>▲ +0.30</a:t>
+              <a:t>▲ +0.20</a:t>
             </a:r>
           </a:p>
         </p:txBody>
@@ -6346,7 +6346,7 @@
                   <a:srgbClr val="152633"/>
                 </a:solidFill>
               </a:rPr>
-              <a:t>101.4%</a:t>
+              <a:t>101.3%</a:t>
             </a:r>
           </a:p>
         </p:txBody>
@@ -6427,8 +6427,8 @@
         </p:nvSpPr>
         <p:spPr>
           <a:xfrm>
-            <a:off x="12626035" y="7923276"/>
-            <a:ext cx="722376" cy="171907"/>
+            <a:off x="12744907" y="7932420"/>
+            <a:ext cx="484632" cy="162763"/>
           </a:xfrm>
           <a:prstGeom prst="rect">
             <a:avLst/>
@@ -6445,10 +6445,10 @@
             <a:r>
               <a:rPr sz="850" b="1" i="0">
                 <a:solidFill>
-                  <a:srgbClr val="4A6273"/>
-                </a:solidFill>
-              </a:rPr>
-              <a:t>sin cambio</a:t>
+                  <a:srgbClr val="B3541F"/>
+                </a:solidFill>
+              </a:rPr>
+              <a:t>▼ -0.10</a:t>
             </a:r>
           </a:p>
         </p:txBody>
@@ -6550,7 +6550,7 @@
                   <a:srgbClr val="152633"/>
                 </a:solidFill>
               </a:rPr>
-              <a:t>101.0%</a:t>
+              <a:t>100.9%</a:t>
             </a:r>
           </a:p>
         </p:txBody>
@@ -6631,8 +6631,8 @@
         </p:nvSpPr>
         <p:spPr>
           <a:xfrm>
-            <a:off x="12626035" y="8215884"/>
-            <a:ext cx="722376" cy="171907"/>
+            <a:off x="12744907" y="8225028"/>
+            <a:ext cx="484632" cy="162763"/>
           </a:xfrm>
           <a:prstGeom prst="rect">
             <a:avLst/>
@@ -6649,10 +6649,10 @@
             <a:r>
               <a:rPr sz="850" b="1" i="0">
                 <a:solidFill>
-                  <a:srgbClr val="4A6273"/>
-                </a:solidFill>
-              </a:rPr>
-              <a:t>sin cambio</a:t>
+                  <a:srgbClr val="B3541F"/>
+                </a:solidFill>
+              </a:rPr>
+              <a:t>▼ -0.10</a:t>
             </a:r>
           </a:p>
         </p:txBody>

--- a/mapa_editable.pptx
+++ b/mapa_editable.pptx
@@ -4126,7 +4126,7 @@
                   <a:srgbClr val="152633"/>
                 </a:solidFill>
               </a:rPr>
-              <a:t>60.1% llenado</a:t>
+              <a:t>59.3% llenado</a:t>
             </a:r>
           </a:p>
         </p:txBody>
@@ -5734,7 +5734,7 @@
                   <a:srgbClr val="152633"/>
                 </a:solidFill>
               </a:rPr>
-              <a:t>60.1%</a:t>
+              <a:t>59.3%</a:t>
             </a:r>
           </a:p>
         </p:txBody>
@@ -5836,7 +5836,7 @@
                   <a:srgbClr val="1B5FA8"/>
                 </a:solidFill>
               </a:rPr>
-              <a:t>▲ +1.20</a:t>
+              <a:t>▲ +0.40</a:t>
             </a:r>
           </a:p>
         </p:txBody>

--- a/mapa_editable.pptx
+++ b/mapa_editable.pptx
@@ -4126,7 +4126,7 @@
                   <a:srgbClr val="152633"/>
                 </a:solidFill>
               </a:rPr>
-              <a:t>59.3% llenado</a:t>
+              <a:t>59.7% llenado</a:t>
             </a:r>
           </a:p>
         </p:txBody>
@@ -4238,7 +4238,7 @@
                   <a:srgbClr val="152633"/>
                 </a:solidFill>
               </a:rPr>
-              <a:t>65.2% llenado</a:t>
+              <a:t>65.5% llenado</a:t>
             </a:r>
           </a:p>
         </p:txBody>
@@ -4339,7 +4339,7 @@
                   <a:srgbClr val="152633"/>
                 </a:solidFill>
               </a:rPr>
-              <a:t>71.6% llenado</a:t>
+              <a:t>71.8% llenado</a:t>
             </a:r>
           </a:p>
         </p:txBody>
@@ -4440,7 +4440,7 @@
                   <a:srgbClr val="152633"/>
                 </a:solidFill>
               </a:rPr>
-              <a:t>101.3% llenado</a:t>
+              <a:t>101.2% llenado</a:t>
             </a:r>
           </a:p>
         </p:txBody>
@@ -4552,7 +4552,7 @@
                   <a:srgbClr val="152633"/>
                 </a:solidFill>
               </a:rPr>
-              <a:t>100.9% llenado</a:t>
+              <a:t>100.7% llenado</a:t>
             </a:r>
           </a:p>
         </p:txBody>
@@ -5530,7 +5530,7 @@
                   <a:srgbClr val="152633"/>
                 </a:solidFill>
               </a:rPr>
-              <a:t>Reporte anterior (25/10/2026)</a:t>
+              <a:t>Reporte anterior (26/10/2026)</a:t>
             </a:r>
           </a:p>
         </p:txBody>
@@ -5564,7 +5564,7 @@
                   <a:srgbClr val="152633"/>
                 </a:solidFill>
               </a:rPr>
-              <a:t>Reporte actual (26/10/2026)</a:t>
+              <a:t>Reporte actual (27/10/2026)</a:t>
             </a:r>
           </a:p>
         </p:txBody>
@@ -5734,7 +5734,7 @@
                   <a:srgbClr val="152633"/>
                 </a:solidFill>
               </a:rPr>
-              <a:t>59.3%</a:t>
+              <a:t>59.7%</a:t>
             </a:r>
           </a:p>
         </p:txBody>
@@ -5802,7 +5802,7 @@
                   <a:srgbClr val="4A6273"/>
                 </a:solidFill>
               </a:rPr>
-              <a:t>58.9%</a:t>
+              <a:t>59.3%</a:t>
             </a:r>
           </a:p>
         </p:txBody>
@@ -5938,7 +5938,7 @@
                   <a:srgbClr val="152633"/>
                 </a:solidFill>
               </a:rPr>
-              <a:t>65.2%</a:t>
+              <a:t>65.5%</a:t>
             </a:r>
           </a:p>
         </p:txBody>
@@ -6006,7 +6006,7 @@
                   <a:srgbClr val="4A6273"/>
                 </a:solidFill>
               </a:rPr>
-              <a:t>64.7%</a:t>
+              <a:t>65.2%</a:t>
             </a:r>
           </a:p>
         </p:txBody>
@@ -6040,7 +6040,7 @@
                   <a:srgbClr val="1B5FA8"/>
                 </a:solidFill>
               </a:rPr>
-              <a:t>▲ +0.50</a:t>
+              <a:t>▲ +0.30</a:t>
             </a:r>
           </a:p>
         </p:txBody>
@@ -6142,7 +6142,7 @@
                   <a:srgbClr val="152633"/>
                 </a:solidFill>
               </a:rPr>
-              <a:t>71.6%</a:t>
+              <a:t>71.8%</a:t>
             </a:r>
           </a:p>
         </p:txBody>
@@ -6210,7 +6210,7 @@
                   <a:srgbClr val="4A6273"/>
                 </a:solidFill>
               </a:rPr>
-              <a:t>71.4%</a:t>
+              <a:t>71.6%</a:t>
             </a:r>
           </a:p>
         </p:txBody>
@@ -6346,7 +6346,7 @@
                   <a:srgbClr val="152633"/>
                 </a:solidFill>
               </a:rPr>
-              <a:t>101.3%</a:t>
+              <a:t>101.2%</a:t>
             </a:r>
           </a:p>
         </p:txBody>
@@ -6414,7 +6414,7 @@
                   <a:srgbClr val="4A6273"/>
                 </a:solidFill>
               </a:rPr>
-              <a:t>101.4%</a:t>
+              <a:t>101.3%</a:t>
             </a:r>
           </a:p>
         </p:txBody>
@@ -6550,7 +6550,7 @@
                   <a:srgbClr val="152633"/>
                 </a:solidFill>
               </a:rPr>
-              <a:t>100.9%</a:t>
+              <a:t>100.7%</a:t>
             </a:r>
           </a:p>
         </p:txBody>
@@ -6618,7 +6618,7 @@
                   <a:srgbClr val="4A6273"/>
                 </a:solidFill>
               </a:rPr>
-              <a:t>101.0%</a:t>
+              <a:t>100.9%</a:t>
             </a:r>
           </a:p>
         </p:txBody>
@@ -6652,7 +6652,7 @@
                   <a:srgbClr val="B3541F"/>
                 </a:solidFill>
               </a:rPr>
-              <a:t>▼ -0.10</a:t>
+              <a:t>▼ -0.20</a:t>
             </a:r>
           </a:p>
         </p:txBody>

--- a/mapa_editable.pptx
+++ b/mapa_editable.pptx
@@ -5530,7 +5530,7 @@
                   <a:srgbClr val="152633"/>
                 </a:solidFill>
               </a:rPr>
-              <a:t>Reporte anterior (26/10/2026)</a:t>
+              <a:t>Reporte anterior (27/10/2026)</a:t>
             </a:r>
           </a:p>
         </p:txBody>
@@ -5564,7 +5564,7 @@
                   <a:srgbClr val="152633"/>
                 </a:solidFill>
               </a:rPr>
-              <a:t>Reporte actual (27/10/2026)</a:t>
+              <a:t>Reporte actual (28/10/2026)</a:t>
             </a:r>
           </a:p>
         </p:txBody>
@@ -5802,7 +5802,7 @@
                   <a:srgbClr val="4A6273"/>
                 </a:solidFill>
               </a:rPr>
-              <a:t>59.3%</a:t>
+              <a:t>59.7%</a:t>
             </a:r>
           </a:p>
         </p:txBody>
@@ -5815,8 +5815,8 @@
         </p:nvSpPr>
         <p:spPr>
           <a:xfrm>
-            <a:off x="12721132" y="7056424"/>
-            <a:ext cx="530352" cy="162763"/>
+            <a:off x="12626035" y="7047280"/>
+            <a:ext cx="722376" cy="171907"/>
           </a:xfrm>
           <a:prstGeom prst="rect">
             <a:avLst/>
@@ -5833,10 +5833,10 @@
             <a:r>
               <a:rPr sz="850" b="1" i="0">
                 <a:solidFill>
-                  <a:srgbClr val="1B5FA8"/>
-                </a:solidFill>
-              </a:rPr>
-              <a:t>▲ +0.40</a:t>
+                  <a:srgbClr val="4A6273"/>
+                </a:solidFill>
+              </a:rPr>
+              <a:t>sin cambio</a:t>
             </a:r>
           </a:p>
         </p:txBody>
@@ -6006,7 +6006,7 @@
                   <a:srgbClr val="4A6273"/>
                 </a:solidFill>
               </a:rPr>
-              <a:t>65.2%</a:t>
+              <a:t>65.5%</a:t>
             </a:r>
           </a:p>
         </p:txBody>
@@ -6019,8 +6019,8 @@
         </p:nvSpPr>
         <p:spPr>
           <a:xfrm>
-            <a:off x="12721132" y="7349032"/>
-            <a:ext cx="530352" cy="162763"/>
+            <a:off x="12626035" y="7339888"/>
+            <a:ext cx="722376" cy="171907"/>
           </a:xfrm>
           <a:prstGeom prst="rect">
             <a:avLst/>
@@ -6037,10 +6037,10 @@
             <a:r>
               <a:rPr sz="850" b="1" i="0">
                 <a:solidFill>
-                  <a:srgbClr val="1B5FA8"/>
-                </a:solidFill>
-              </a:rPr>
-              <a:t>▲ +0.30</a:t>
+                  <a:srgbClr val="4A6273"/>
+                </a:solidFill>
+              </a:rPr>
+              <a:t>sin cambio</a:t>
             </a:r>
           </a:p>
         </p:txBody>
@@ -6210,7 +6210,7 @@
                   <a:srgbClr val="4A6273"/>
                 </a:solidFill>
               </a:rPr>
-              <a:t>71.6%</a:t>
+              <a:t>71.8%</a:t>
             </a:r>
           </a:p>
         </p:txBody>
@@ -6223,8 +6223,8 @@
         </p:nvSpPr>
         <p:spPr>
           <a:xfrm>
-            <a:off x="12721132" y="7640726"/>
-            <a:ext cx="530352" cy="162763"/>
+            <a:off x="12626035" y="7631582"/>
+            <a:ext cx="722376" cy="171907"/>
           </a:xfrm>
           <a:prstGeom prst="rect">
             <a:avLst/>
@@ -6241,10 +6241,10 @@
             <a:r>
               <a:rPr sz="850" b="1" i="0">
                 <a:solidFill>
-                  <a:srgbClr val="1B5FA8"/>
-                </a:solidFill>
-              </a:rPr>
-              <a:t>▲ +0.20</a:t>
+                  <a:srgbClr val="4A6273"/>
+                </a:solidFill>
+              </a:rPr>
+              <a:t>sin cambio</a:t>
             </a:r>
           </a:p>
         </p:txBody>
@@ -6414,7 +6414,7 @@
                   <a:srgbClr val="4A6273"/>
                 </a:solidFill>
               </a:rPr>
-              <a:t>101.3%</a:t>
+              <a:t>101.2%</a:t>
             </a:r>
           </a:p>
         </p:txBody>
@@ -6427,8 +6427,8 @@
         </p:nvSpPr>
         <p:spPr>
           <a:xfrm>
-            <a:off x="12744907" y="7932420"/>
-            <a:ext cx="484632" cy="162763"/>
+            <a:off x="12626035" y="7923276"/>
+            <a:ext cx="722376" cy="171907"/>
           </a:xfrm>
           <a:prstGeom prst="rect">
             <a:avLst/>
@@ -6445,10 +6445,10 @@
             <a:r>
               <a:rPr sz="850" b="1" i="0">
                 <a:solidFill>
-                  <a:srgbClr val="B3541F"/>
-                </a:solidFill>
-              </a:rPr>
-              <a:t>▼ -0.10</a:t>
+                  <a:srgbClr val="4A6273"/>
+                </a:solidFill>
+              </a:rPr>
+              <a:t>sin cambio</a:t>
             </a:r>
           </a:p>
         </p:txBody>
@@ -6618,7 +6618,7 @@
                   <a:srgbClr val="4A6273"/>
                 </a:solidFill>
               </a:rPr>
-              <a:t>100.9%</a:t>
+              <a:t>100.7%</a:t>
             </a:r>
           </a:p>
         </p:txBody>
@@ -6631,8 +6631,8 @@
         </p:nvSpPr>
         <p:spPr>
           <a:xfrm>
-            <a:off x="12744907" y="8225028"/>
-            <a:ext cx="484632" cy="162763"/>
+            <a:off x="12626035" y="8215884"/>
+            <a:ext cx="722376" cy="171907"/>
           </a:xfrm>
           <a:prstGeom prst="rect">
             <a:avLst/>
@@ -6649,10 +6649,10 @@
             <a:r>
               <a:rPr sz="850" b="1" i="0">
                 <a:solidFill>
-                  <a:srgbClr val="B3541F"/>
-                </a:solidFill>
-              </a:rPr>
-              <a:t>▼ -0.20</a:t>
+                  <a:srgbClr val="4A6273"/>
+                </a:solidFill>
+              </a:rPr>
+              <a:t>sin cambio</a:t>
             </a:r>
           </a:p>
         </p:txBody>

--- a/mapa_editable.pptx
+++ b/mapa_editable.pptx
@@ -4126,7 +4126,7 @@
                   <a:srgbClr val="152633"/>
                 </a:solidFill>
               </a:rPr>
-              <a:t>59.7% llenado</a:t>
+              <a:t>59.9% llenado</a:t>
             </a:r>
           </a:p>
         </p:txBody>
@@ -4238,7 +4238,7 @@
                   <a:srgbClr val="152633"/>
                 </a:solidFill>
               </a:rPr>
-              <a:t>65.5% llenado</a:t>
+              <a:t>65.8% llenado</a:t>
             </a:r>
           </a:p>
         </p:txBody>
@@ -5734,7 +5734,7 @@
                   <a:srgbClr val="152633"/>
                 </a:solidFill>
               </a:rPr>
-              <a:t>59.7%</a:t>
+              <a:t>59.9%</a:t>
             </a:r>
           </a:p>
         </p:txBody>
@@ -5815,8 +5815,8 @@
         </p:nvSpPr>
         <p:spPr>
           <a:xfrm>
-            <a:off x="12626035" y="7047280"/>
-            <a:ext cx="722376" cy="171907"/>
+            <a:off x="12721132" y="7056424"/>
+            <a:ext cx="530352" cy="162763"/>
           </a:xfrm>
           <a:prstGeom prst="rect">
             <a:avLst/>
@@ -5833,10 +5833,10 @@
             <a:r>
               <a:rPr sz="850" b="1" i="0">
                 <a:solidFill>
-                  <a:srgbClr val="4A6273"/>
-                </a:solidFill>
-              </a:rPr>
-              <a:t>sin cambio</a:t>
+                  <a:srgbClr val="1B5FA8"/>
+                </a:solidFill>
+              </a:rPr>
+              <a:t>▲ +0.20</a:t>
             </a:r>
           </a:p>
         </p:txBody>
@@ -5938,7 +5938,7 @@
                   <a:srgbClr val="152633"/>
                 </a:solidFill>
               </a:rPr>
-              <a:t>65.5%</a:t>
+              <a:t>65.8%</a:t>
             </a:r>
           </a:p>
         </p:txBody>
@@ -6019,8 +6019,8 @@
         </p:nvSpPr>
         <p:spPr>
           <a:xfrm>
-            <a:off x="12626035" y="7339888"/>
-            <a:ext cx="722376" cy="171907"/>
+            <a:off x="12721132" y="7349032"/>
+            <a:ext cx="530352" cy="162763"/>
           </a:xfrm>
           <a:prstGeom prst="rect">
             <a:avLst/>
@@ -6037,10 +6037,10 @@
             <a:r>
               <a:rPr sz="850" b="1" i="0">
                 <a:solidFill>
-                  <a:srgbClr val="4A6273"/>
-                </a:solidFill>
-              </a:rPr>
-              <a:t>sin cambio</a:t>
+                  <a:srgbClr val="1B5FA8"/>
+                </a:solidFill>
+              </a:rPr>
+              <a:t>▲ +0.30</a:t>
             </a:r>
           </a:p>
         </p:txBody>

--- a/mapa_editable.pptx
+++ b/mapa_editable.pptx
@@ -5530,7 +5530,7 @@
                   <a:srgbClr val="152633"/>
                 </a:solidFill>
               </a:rPr>
-              <a:t>Reporte anterior (27/10/2026)</a:t>
+              <a:t>Reporte anterior (28/10/2026)</a:t>
             </a:r>
           </a:p>
         </p:txBody>
@@ -5564,7 +5564,7 @@
                   <a:srgbClr val="152633"/>
                 </a:solidFill>
               </a:rPr>
-              <a:t>Reporte actual (28/10/2026)</a:t>
+              <a:t>Reporte actual (29/10/2026)</a:t>
             </a:r>
           </a:p>
         </p:txBody>
@@ -5802,7 +5802,7 @@
                   <a:srgbClr val="4A6273"/>
                 </a:solidFill>
               </a:rPr>
-              <a:t>59.7%</a:t>
+              <a:t>59.9%</a:t>
             </a:r>
           </a:p>
         </p:txBody>
@@ -5815,8 +5815,8 @@
         </p:nvSpPr>
         <p:spPr>
           <a:xfrm>
-            <a:off x="12721132" y="7056424"/>
-            <a:ext cx="530352" cy="162763"/>
+            <a:off x="12626035" y="7047280"/>
+            <a:ext cx="722376" cy="171907"/>
           </a:xfrm>
           <a:prstGeom prst="rect">
             <a:avLst/>
@@ -5833,10 +5833,10 @@
             <a:r>
               <a:rPr sz="850" b="1" i="0">
                 <a:solidFill>
-                  <a:srgbClr val="1B5FA8"/>
-                </a:solidFill>
-              </a:rPr>
-              <a:t>▲ +0.20</a:t>
+                  <a:srgbClr val="4A6273"/>
+                </a:solidFill>
+              </a:rPr>
+              <a:t>sin cambio</a:t>
             </a:r>
           </a:p>
         </p:txBody>
@@ -6006,7 +6006,7 @@
                   <a:srgbClr val="4A6273"/>
                 </a:solidFill>
               </a:rPr>
-              <a:t>65.5%</a:t>
+              <a:t>65.8%</a:t>
             </a:r>
           </a:p>
         </p:txBody>
@@ -6019,8 +6019,8 @@
         </p:nvSpPr>
         <p:spPr>
           <a:xfrm>
-            <a:off x="12721132" y="7349032"/>
-            <a:ext cx="530352" cy="162763"/>
+            <a:off x="12626035" y="7339888"/>
+            <a:ext cx="722376" cy="171907"/>
           </a:xfrm>
           <a:prstGeom prst="rect">
             <a:avLst/>
@@ -6037,10 +6037,10 @@
             <a:r>
               <a:rPr sz="850" b="1" i="0">
                 <a:solidFill>
-                  <a:srgbClr val="1B5FA8"/>
-                </a:solidFill>
-              </a:rPr>
-              <a:t>▲ +0.30</a:t>
+                  <a:srgbClr val="4A6273"/>
+                </a:solidFill>
+              </a:rPr>
+              <a:t>sin cambio</a:t>
             </a:r>
           </a:p>
         </p:txBody>

--- a/mapa_editable.pptx
+++ b/mapa_editable.pptx
@@ -4126,7 +4126,7 @@
                   <a:srgbClr val="152633"/>
                 </a:solidFill>
               </a:rPr>
-              <a:t>59.9% llenado</a:t>
+              <a:t>60.1% llenado</a:t>
             </a:r>
           </a:p>
         </p:txBody>
@@ -4238,7 +4238,7 @@
                   <a:srgbClr val="152633"/>
                 </a:solidFill>
               </a:rPr>
-              <a:t>65.8% llenado</a:t>
+              <a:t>66.0% llenado</a:t>
             </a:r>
           </a:p>
         </p:txBody>
@@ -4552,7 +4552,7 @@
                   <a:srgbClr val="152633"/>
                 </a:solidFill>
               </a:rPr>
-              <a:t>100.7% llenado</a:t>
+              <a:t>100.6% llenado</a:t>
             </a:r>
           </a:p>
         </p:txBody>
@@ -5734,7 +5734,7 @@
                   <a:srgbClr val="152633"/>
                 </a:solidFill>
               </a:rPr>
-              <a:t>59.9%</a:t>
+              <a:t>60.1%</a:t>
             </a:r>
           </a:p>
         </p:txBody>
@@ -5815,8 +5815,8 @@
         </p:nvSpPr>
         <p:spPr>
           <a:xfrm>
-            <a:off x="12626035" y="7047280"/>
-            <a:ext cx="722376" cy="171907"/>
+            <a:off x="12721132" y="7056424"/>
+            <a:ext cx="530352" cy="162763"/>
           </a:xfrm>
           <a:prstGeom prst="rect">
             <a:avLst/>
@@ -5833,10 +5833,10 @@
             <a:r>
               <a:rPr sz="850" b="1" i="0">
                 <a:solidFill>
-                  <a:srgbClr val="4A6273"/>
-                </a:solidFill>
-              </a:rPr>
-              <a:t>sin cambio</a:t>
+                  <a:srgbClr val="1B5FA8"/>
+                </a:solidFill>
+              </a:rPr>
+              <a:t>▲ +0.20</a:t>
             </a:r>
           </a:p>
         </p:txBody>
@@ -5938,7 +5938,7 @@
                   <a:srgbClr val="152633"/>
                 </a:solidFill>
               </a:rPr>
-              <a:t>65.8%</a:t>
+              <a:t>66.0%</a:t>
             </a:r>
           </a:p>
         </p:txBody>
@@ -6019,8 +6019,8 @@
         </p:nvSpPr>
         <p:spPr>
           <a:xfrm>
-            <a:off x="12626035" y="7339888"/>
-            <a:ext cx="722376" cy="171907"/>
+            <a:off x="12721132" y="7349032"/>
+            <a:ext cx="530352" cy="162763"/>
           </a:xfrm>
           <a:prstGeom prst="rect">
             <a:avLst/>
@@ -6037,10 +6037,10 @@
             <a:r>
               <a:rPr sz="850" b="1" i="0">
                 <a:solidFill>
-                  <a:srgbClr val="4A6273"/>
-                </a:solidFill>
-              </a:rPr>
-              <a:t>sin cambio</a:t>
+                  <a:srgbClr val="1B5FA8"/>
+                </a:solidFill>
+              </a:rPr>
+              <a:t>▲ +0.20</a:t>
             </a:r>
           </a:p>
         </p:txBody>
@@ -6550,7 +6550,7 @@
                   <a:srgbClr val="152633"/>
                 </a:solidFill>
               </a:rPr>
-              <a:t>100.7%</a:t>
+              <a:t>100.6%</a:t>
             </a:r>
           </a:p>
         </p:txBody>
@@ -6631,8 +6631,8 @@
         </p:nvSpPr>
         <p:spPr>
           <a:xfrm>
-            <a:off x="12626035" y="8215884"/>
-            <a:ext cx="722376" cy="171907"/>
+            <a:off x="12744907" y="8225028"/>
+            <a:ext cx="484632" cy="162763"/>
           </a:xfrm>
           <a:prstGeom prst="rect">
             <a:avLst/>
@@ -6649,10 +6649,10 @@
             <a:r>
               <a:rPr sz="850" b="1" i="0">
                 <a:solidFill>
-                  <a:srgbClr val="4A6273"/>
-                </a:solidFill>
-              </a:rPr>
-              <a:t>sin cambio</a:t>
+                  <a:srgbClr val="B3541F"/>
+                </a:solidFill>
+              </a:rPr>
+              <a:t>▼ -0.10</a:t>
             </a:r>
           </a:p>
         </p:txBody>

--- a/mapa_editable.pptx
+++ b/mapa_editable.pptx
@@ -5530,7 +5530,7 @@
                   <a:srgbClr val="152633"/>
                 </a:solidFill>
               </a:rPr>
-              <a:t>Reporte anterior (28/10/2026)</a:t>
+              <a:t>Reporte anterior (29/10/2026)</a:t>
             </a:r>
           </a:p>
         </p:txBody>
@@ -5564,7 +5564,7 @@
                   <a:srgbClr val="152633"/>
                 </a:solidFill>
               </a:rPr>
-              <a:t>Reporte actual (29/10/2026)</a:t>
+              <a:t>Reporte actual (30/10/2026)</a:t>
             </a:r>
           </a:p>
         </p:txBody>
@@ -5802,7 +5802,7 @@
                   <a:srgbClr val="4A6273"/>
                 </a:solidFill>
               </a:rPr>
-              <a:t>59.9%</a:t>
+              <a:t>60.1%</a:t>
             </a:r>
           </a:p>
         </p:txBody>
@@ -5815,8 +5815,8 @@
         </p:nvSpPr>
         <p:spPr>
           <a:xfrm>
-            <a:off x="12721132" y="7056424"/>
-            <a:ext cx="530352" cy="162763"/>
+            <a:off x="12626035" y="7047280"/>
+            <a:ext cx="722376" cy="171907"/>
           </a:xfrm>
           <a:prstGeom prst="rect">
             <a:avLst/>
@@ -5833,10 +5833,10 @@
             <a:r>
               <a:rPr sz="850" b="1" i="0">
                 <a:solidFill>
-                  <a:srgbClr val="1B5FA8"/>
-                </a:solidFill>
-              </a:rPr>
-              <a:t>▲ +0.20</a:t>
+                  <a:srgbClr val="4A6273"/>
+                </a:solidFill>
+              </a:rPr>
+              <a:t>sin cambio</a:t>
             </a:r>
           </a:p>
         </p:txBody>
@@ -6006,7 +6006,7 @@
                   <a:srgbClr val="4A6273"/>
                 </a:solidFill>
               </a:rPr>
-              <a:t>65.8%</a:t>
+              <a:t>66.0%</a:t>
             </a:r>
           </a:p>
         </p:txBody>
@@ -6019,8 +6019,8 @@
         </p:nvSpPr>
         <p:spPr>
           <a:xfrm>
-            <a:off x="12721132" y="7349032"/>
-            <a:ext cx="530352" cy="162763"/>
+            <a:off x="12626035" y="7339888"/>
+            <a:ext cx="722376" cy="171907"/>
           </a:xfrm>
           <a:prstGeom prst="rect">
             <a:avLst/>
@@ -6037,10 +6037,10 @@
             <a:r>
               <a:rPr sz="850" b="1" i="0">
                 <a:solidFill>
-                  <a:srgbClr val="1B5FA8"/>
-                </a:solidFill>
-              </a:rPr>
-              <a:t>▲ +0.20</a:t>
+                  <a:srgbClr val="4A6273"/>
+                </a:solidFill>
+              </a:rPr>
+              <a:t>sin cambio</a:t>
             </a:r>
           </a:p>
         </p:txBody>
@@ -6618,7 +6618,7 @@
                   <a:srgbClr val="4A6273"/>
                 </a:solidFill>
               </a:rPr>
-              <a:t>100.7%</a:t>
+              <a:t>100.6%</a:t>
             </a:r>
           </a:p>
         </p:txBody>
@@ -6631,8 +6631,8 @@
         </p:nvSpPr>
         <p:spPr>
           <a:xfrm>
-            <a:off x="12744907" y="8225028"/>
-            <a:ext cx="484632" cy="162763"/>
+            <a:off x="12626035" y="8215884"/>
+            <a:ext cx="722376" cy="171907"/>
           </a:xfrm>
           <a:prstGeom prst="rect">
             <a:avLst/>
@@ -6649,10 +6649,10 @@
             <a:r>
               <a:rPr sz="850" b="1" i="0">
                 <a:solidFill>
-                  <a:srgbClr val="B3541F"/>
-                </a:solidFill>
-              </a:rPr>
-              <a:t>▼ -0.10</a:t>
+                  <a:srgbClr val="4A6273"/>
+                </a:solidFill>
+              </a:rPr>
+              <a:t>sin cambio</a:t>
             </a:r>
           </a:p>
         </p:txBody>

--- a/mapa_editable.pptx
+++ b/mapa_editable.pptx
@@ -4126,7 +4126,7 @@
                   <a:srgbClr val="152633"/>
                 </a:solidFill>
               </a:rPr>
-              <a:t>60.1% llenado</a:t>
+              <a:t>60.3% llenado</a:t>
             </a:r>
           </a:p>
         </p:txBody>
@@ -4238,7 +4238,7 @@
                   <a:srgbClr val="152633"/>
                 </a:solidFill>
               </a:rPr>
-              <a:t>66.0% llenado</a:t>
+              <a:t>66.2% llenado</a:t>
             </a:r>
           </a:p>
         </p:txBody>
@@ -4339,7 +4339,7 @@
                   <a:srgbClr val="152633"/>
                 </a:solidFill>
               </a:rPr>
-              <a:t>71.8% llenado</a:t>
+              <a:t>71.9% llenado</a:t>
             </a:r>
           </a:p>
         </p:txBody>
@@ -5734,7 +5734,7 @@
                   <a:srgbClr val="152633"/>
                 </a:solidFill>
               </a:rPr>
-              <a:t>60.1%</a:t>
+              <a:t>60.3%</a:t>
             </a:r>
           </a:p>
         </p:txBody>
@@ -5815,8 +5815,8 @@
         </p:nvSpPr>
         <p:spPr>
           <a:xfrm>
-            <a:off x="12626035" y="7047280"/>
-            <a:ext cx="722376" cy="171907"/>
+            <a:off x="12721132" y="7056424"/>
+            <a:ext cx="530352" cy="162763"/>
           </a:xfrm>
           <a:prstGeom prst="rect">
             <a:avLst/>
@@ -5833,10 +5833,10 @@
             <a:r>
               <a:rPr sz="850" b="1" i="0">
                 <a:solidFill>
-                  <a:srgbClr val="4A6273"/>
-                </a:solidFill>
-              </a:rPr>
-              <a:t>sin cambio</a:t>
+                  <a:srgbClr val="1B5FA8"/>
+                </a:solidFill>
+              </a:rPr>
+              <a:t>▲ +0.20</a:t>
             </a:r>
           </a:p>
         </p:txBody>
@@ -5938,7 +5938,7 @@
                   <a:srgbClr val="152633"/>
                 </a:solidFill>
               </a:rPr>
-              <a:t>66.0%</a:t>
+              <a:t>66.2%</a:t>
             </a:r>
           </a:p>
         </p:txBody>
@@ -6019,8 +6019,8 @@
         </p:nvSpPr>
         <p:spPr>
           <a:xfrm>
-            <a:off x="12626035" y="7339888"/>
-            <a:ext cx="722376" cy="171907"/>
+            <a:off x="12721132" y="7349032"/>
+            <a:ext cx="530352" cy="162763"/>
           </a:xfrm>
           <a:prstGeom prst="rect">
             <a:avLst/>
@@ -6037,10 +6037,10 @@
             <a:r>
               <a:rPr sz="850" b="1" i="0">
                 <a:solidFill>
-                  <a:srgbClr val="4A6273"/>
-                </a:solidFill>
-              </a:rPr>
-              <a:t>sin cambio</a:t>
+                  <a:srgbClr val="1B5FA8"/>
+                </a:solidFill>
+              </a:rPr>
+              <a:t>▲ +0.20</a:t>
             </a:r>
           </a:p>
         </p:txBody>
@@ -6142,7 +6142,7 @@
                   <a:srgbClr val="152633"/>
                 </a:solidFill>
               </a:rPr>
-              <a:t>71.8%</a:t>
+              <a:t>71.9%</a:t>
             </a:r>
           </a:p>
         </p:txBody>
@@ -6223,8 +6223,8 @@
         </p:nvSpPr>
         <p:spPr>
           <a:xfrm>
-            <a:off x="12626035" y="7631582"/>
-            <a:ext cx="722376" cy="171907"/>
+            <a:off x="12721132" y="7640726"/>
+            <a:ext cx="530352" cy="162763"/>
           </a:xfrm>
           <a:prstGeom prst="rect">
             <a:avLst/>
@@ -6241,10 +6241,10 @@
             <a:r>
               <a:rPr sz="850" b="1" i="0">
                 <a:solidFill>
-                  <a:srgbClr val="4A6273"/>
-                </a:solidFill>
-              </a:rPr>
-              <a:t>sin cambio</a:t>
+                  <a:srgbClr val="1B5FA8"/>
+                </a:solidFill>
+              </a:rPr>
+              <a:t>▲ +0.10</a:t>
             </a:r>
           </a:p>
         </p:txBody>
